--- a/denken-shinkansen/05_shinkansen_vehicle_2/topics/29_l0_superconducting_magnetic_levitation_force/29_l0_superconducting_magnetic_levitation_force_images.pptx
+++ b/denken-shinkansen/05_shinkansen_vehicle_2/topics/29_l0_superconducting_magnetic_levitation_force/29_l0_superconducting_magnetic_levitation_force_images.pptx
@@ -1614,6 +1614,10 @@
             <a:prstDash val="solid"/>
           </a:ln>
         </p:spPr>
+        <p:txBody>
+          <a:bodyPr/>
+          <a:p/>
+        </p:txBody>
       </p:sp>
       <p:sp>
         <p:nvSpPr>
@@ -1679,6 +1683,10 @@
             <a:tailEnd type="triangle"/>
           </a:ln>
         </p:spPr>
+        <p:txBody>
+          <a:bodyPr/>
+          <a:p/>
+        </p:txBody>
       </p:sp>
       <p:sp>
         <p:nvSpPr>
@@ -1704,6 +1712,10 @@
             <a:prstDash val="solid"/>
           </a:ln>
         </p:spPr>
+        <p:txBody>
+          <a:bodyPr/>
+          <a:p/>
+        </p:txBody>
       </p:sp>
       <p:sp>
         <p:nvSpPr>
@@ -1769,6 +1781,10 @@
             <a:tailEnd type="triangle"/>
           </a:ln>
         </p:spPr>
+        <p:txBody>
+          <a:bodyPr/>
+          <a:p/>
+        </p:txBody>
       </p:sp>
       <p:sp>
         <p:nvSpPr>
@@ -1794,6 +1810,10 @@
             <a:prstDash val="solid"/>
           </a:ln>
         </p:spPr>
+        <p:txBody>
+          <a:bodyPr/>
+          <a:p/>
+        </p:txBody>
       </p:sp>
       <p:sp>
         <p:nvSpPr>
@@ -1859,6 +1879,10 @@
             <a:tailEnd type="triangle"/>
           </a:ln>
         </p:spPr>
+        <p:txBody>
+          <a:bodyPr/>
+          <a:p/>
+        </p:txBody>
       </p:sp>
       <p:sp>
         <p:nvSpPr>
@@ -1884,6 +1908,10 @@
             <a:prstDash val="solid"/>
           </a:ln>
         </p:spPr>
+        <p:txBody>
+          <a:bodyPr/>
+          <a:p/>
+        </p:txBody>
       </p:sp>
       <p:sp>
         <p:nvSpPr>
@@ -1949,6 +1977,10 @@
             <a:tailEnd type="triangle"/>
           </a:ln>
         </p:spPr>
+        <p:txBody>
+          <a:bodyPr/>
+          <a:p/>
+        </p:txBody>
       </p:sp>
       <p:sp>
         <p:nvSpPr>
@@ -1974,6 +2006,10 @@
             <a:prstDash val="solid"/>
           </a:ln>
         </p:spPr>
+        <p:txBody>
+          <a:bodyPr/>
+          <a:p/>
+        </p:txBody>
       </p:sp>
       <p:sp>
         <p:nvSpPr>
@@ -2042,6 +2078,10 @@
             <a:prstDash val="solid"/>
           </a:ln>
         </p:spPr>
+        <p:txBody>
+          <a:bodyPr/>
+          <a:p/>
+        </p:txBody>
       </p:sp>
       <p:sp>
         <p:nvSpPr>
@@ -2067,6 +2107,10 @@
             <a:prstDash val="solid"/>
           </a:ln>
         </p:spPr>
+        <p:txBody>
+          <a:bodyPr/>
+          <a:p/>
+        </p:txBody>
       </p:sp>
       <p:sp>
         <p:nvSpPr>
@@ -2199,6 +2243,10 @@
             <a:prstDash val="solid"/>
           </a:ln>
         </p:spPr>
+        <p:txBody>
+          <a:bodyPr/>
+          <a:p/>
+        </p:txBody>
       </p:sp>
       <p:sp>
         <p:nvSpPr>
@@ -2224,6 +2272,10 @@
             <a:prstDash val="solid"/>
           </a:ln>
         </p:spPr>
+        <p:txBody>
+          <a:bodyPr/>
+          <a:p/>
+        </p:txBody>
       </p:sp>
       <p:sp>
         <p:nvSpPr>
@@ -2586,6 +2638,10 @@
             <a:prstDash val="solid"/>
           </a:ln>
         </p:spPr>
+        <p:txBody>
+          <a:bodyPr/>
+          <a:p/>
+        </p:txBody>
       </p:sp>
       <p:sp>
         <p:nvSpPr>
@@ -2611,6 +2667,10 @@
             <a:prstDash val="solid"/>
           </a:ln>
         </p:spPr>
+        <p:txBody>
+          <a:bodyPr/>
+          <a:p/>
+        </p:txBody>
       </p:sp>
       <p:sp>
         <p:nvSpPr>
@@ -2811,6 +2871,10 @@
             <a:prstDash val="solid"/>
           </a:ln>
         </p:spPr>
+        <p:txBody>
+          <a:bodyPr/>
+          <a:p/>
+        </p:txBody>
       </p:sp>
       <p:sp>
         <p:nvSpPr>
@@ -2836,6 +2900,10 @@
             <a:prstDash val="solid"/>
           </a:ln>
         </p:spPr>
+        <p:txBody>
+          <a:bodyPr/>
+          <a:p/>
+        </p:txBody>
       </p:sp>
       <p:sp>
         <p:nvSpPr>
@@ -3011,6 +3079,10 @@
             <a:prstDash val="solid"/>
           </a:ln>
         </p:spPr>
+        <p:txBody>
+          <a:bodyPr/>
+          <a:p/>
+        </p:txBody>
       </p:sp>
       <p:sp>
         <p:nvSpPr>
@@ -3076,6 +3148,10 @@
             <a:tailEnd type="triangle"/>
           </a:ln>
         </p:spPr>
+        <p:txBody>
+          <a:bodyPr/>
+          <a:p/>
+        </p:txBody>
       </p:sp>
       <p:sp>
         <p:nvSpPr>
@@ -3100,6 +3176,10 @@
             <a:tailEnd type="triangle"/>
           </a:ln>
         </p:spPr>
+        <p:txBody>
+          <a:bodyPr/>
+          <a:p/>
+        </p:txBody>
       </p:sp>
       <p:sp>
         <p:nvSpPr>
@@ -3206,6 +3286,10 @@
             <a:tailEnd type="none"/>
           </a:ln>
         </p:spPr>
+        <p:txBody>
+          <a:bodyPr/>
+          <a:p/>
+        </p:txBody>
       </p:sp>
       <p:sp>
         <p:nvSpPr>
@@ -3271,6 +3355,10 @@
             <a:tailEnd type="none"/>
           </a:ln>
         </p:spPr>
+        <p:txBody>
+          <a:bodyPr/>
+          <a:p/>
+        </p:txBody>
       </p:sp>
       <p:sp>
         <p:nvSpPr>
@@ -3336,6 +3424,10 @@
             <a:tailEnd type="none"/>
           </a:ln>
         </p:spPr>
+        <p:txBody>
+          <a:bodyPr/>
+          <a:p/>
+        </p:txBody>
       </p:sp>
       <p:sp>
         <p:nvSpPr>
@@ -3401,6 +3493,10 @@
             <a:tailEnd type="none"/>
           </a:ln>
         </p:spPr>
+        <p:txBody>
+          <a:bodyPr/>
+          <a:p/>
+        </p:txBody>
       </p:sp>
       <p:sp>
         <p:nvSpPr>
@@ -3466,6 +3562,10 @@
             <a:tailEnd type="none"/>
           </a:ln>
         </p:spPr>
+        <p:txBody>
+          <a:bodyPr/>
+          <a:p/>
+        </p:txBody>
       </p:sp>
       <p:sp>
         <p:nvSpPr>
@@ -3531,6 +3631,10 @@
             <a:tailEnd type="none"/>
           </a:ln>
         </p:spPr>
+        <p:txBody>
+          <a:bodyPr/>
+          <a:p/>
+        </p:txBody>
       </p:sp>
       <p:sp>
         <p:nvSpPr>
@@ -3596,6 +3700,10 @@
             <a:tailEnd type="none"/>
           </a:ln>
         </p:spPr>
+        <p:txBody>
+          <a:bodyPr/>
+          <a:p/>
+        </p:txBody>
       </p:sp>
       <p:sp>
         <p:nvSpPr>
@@ -3661,6 +3769,10 @@
             <a:tailEnd type="none"/>
           </a:ln>
         </p:spPr>
+        <p:txBody>
+          <a:bodyPr/>
+          <a:p/>
+        </p:txBody>
       </p:sp>
       <p:sp>
         <p:nvSpPr>
@@ -3726,6 +3838,10 @@
             <a:tailEnd type="none"/>
           </a:ln>
         </p:spPr>
+        <p:txBody>
+          <a:bodyPr/>
+          <a:p/>
+        </p:txBody>
       </p:sp>
       <p:sp>
         <p:nvSpPr>
@@ -3750,6 +3866,10 @@
             <a:tailEnd type="none"/>
           </a:ln>
         </p:spPr>
+        <p:txBody>
+          <a:bodyPr/>
+          <a:p/>
+        </p:txBody>
       </p:sp>
       <p:sp>
         <p:nvSpPr>
@@ -3774,6 +3894,10 @@
             <a:tailEnd type="none"/>
           </a:ln>
         </p:spPr>
+        <p:txBody>
+          <a:bodyPr/>
+          <a:p/>
+        </p:txBody>
       </p:sp>
       <p:sp>
         <p:nvSpPr>
@@ -3798,6 +3922,10 @@
             <a:tailEnd type="none"/>
           </a:ln>
         </p:spPr>
+        <p:txBody>
+          <a:bodyPr/>
+          <a:p/>
+        </p:txBody>
       </p:sp>
       <p:sp>
         <p:nvSpPr>
@@ -3822,6 +3950,10 @@
             <a:tailEnd type="none"/>
           </a:ln>
         </p:spPr>
+        <p:txBody>
+          <a:bodyPr/>
+          <a:p/>
+        </p:txBody>
       </p:sp>
       <p:sp>
         <p:nvSpPr>
@@ -3846,6 +3978,10 @@
             <a:tailEnd type="none"/>
           </a:ln>
         </p:spPr>
+        <p:txBody>
+          <a:bodyPr/>
+          <a:p/>
+        </p:txBody>
       </p:sp>
       <p:sp>
         <p:nvSpPr>
@@ -3870,6 +4006,10 @@
             <a:tailEnd type="none"/>
           </a:ln>
         </p:spPr>
+        <p:txBody>
+          <a:bodyPr/>
+          <a:p/>
+        </p:txBody>
       </p:sp>
       <p:sp>
         <p:nvSpPr>
@@ -3894,6 +4034,10 @@
             <a:tailEnd type="none"/>
           </a:ln>
         </p:spPr>
+        <p:txBody>
+          <a:bodyPr/>
+          <a:p/>
+        </p:txBody>
       </p:sp>
       <p:sp>
         <p:nvSpPr>
@@ -3918,6 +4062,10 @@
             <a:tailEnd type="none"/>
           </a:ln>
         </p:spPr>
+        <p:txBody>
+          <a:bodyPr/>
+          <a:p/>
+        </p:txBody>
       </p:sp>
       <p:sp>
         <p:nvSpPr>
@@ -3942,6 +4090,10 @@
             <a:tailEnd type="none"/>
           </a:ln>
         </p:spPr>
+        <p:txBody>
+          <a:bodyPr/>
+          <a:p/>
+        </p:txBody>
       </p:sp>
       <p:sp>
         <p:nvSpPr>
@@ -3966,6 +4118,10 @@
             <a:tailEnd type="none"/>
           </a:ln>
         </p:spPr>
+        <p:txBody>
+          <a:bodyPr/>
+          <a:p/>
+        </p:txBody>
       </p:sp>
       <p:sp>
         <p:nvSpPr>
@@ -3990,6 +4146,10 @@
             <a:tailEnd type="none"/>
           </a:ln>
         </p:spPr>
+        <p:txBody>
+          <a:bodyPr/>
+          <a:p/>
+        </p:txBody>
       </p:sp>
       <p:sp>
         <p:nvSpPr>
@@ -4014,6 +4174,10 @@
             <a:tailEnd type="none"/>
           </a:ln>
         </p:spPr>
+        <p:txBody>
+          <a:bodyPr/>
+          <a:p/>
+        </p:txBody>
       </p:sp>
       <p:sp>
         <p:nvSpPr>
@@ -4038,6 +4202,10 @@
             <a:tailEnd type="none"/>
           </a:ln>
         </p:spPr>
+        <p:txBody>
+          <a:bodyPr/>
+          <a:p/>
+        </p:txBody>
       </p:sp>
       <p:sp>
         <p:nvSpPr>
@@ -4062,6 +4230,10 @@
             <a:tailEnd type="none"/>
           </a:ln>
         </p:spPr>
+        <p:txBody>
+          <a:bodyPr/>
+          <a:p/>
+        </p:txBody>
       </p:sp>
       <p:sp>
         <p:nvSpPr>
@@ -4086,6 +4258,10 @@
             <a:tailEnd type="none"/>
           </a:ln>
         </p:spPr>
+        <p:txBody>
+          <a:bodyPr/>
+          <a:p/>
+        </p:txBody>
       </p:sp>
       <p:sp>
         <p:nvSpPr>
@@ -4110,6 +4286,10 @@
             <a:tailEnd type="none"/>
           </a:ln>
         </p:spPr>
+        <p:txBody>
+          <a:bodyPr/>
+          <a:p/>
+        </p:txBody>
       </p:sp>
       <p:sp>
         <p:nvSpPr>
@@ -4134,6 +4314,10 @@
             <a:tailEnd type="none"/>
           </a:ln>
         </p:spPr>
+        <p:txBody>
+          <a:bodyPr/>
+          <a:p/>
+        </p:txBody>
       </p:sp>
       <p:sp>
         <p:nvSpPr>
@@ -4158,6 +4342,10 @@
             <a:tailEnd type="none"/>
           </a:ln>
         </p:spPr>
+        <p:txBody>
+          <a:bodyPr/>
+          <a:p/>
+        </p:txBody>
       </p:sp>
       <p:sp>
         <p:nvSpPr>
@@ -4182,6 +4370,10 @@
             <a:tailEnd type="none"/>
           </a:ln>
         </p:spPr>
+        <p:txBody>
+          <a:bodyPr/>
+          <a:p/>
+        </p:txBody>
       </p:sp>
       <p:sp>
         <p:nvSpPr>
@@ -4206,6 +4398,10 @@
             <a:tailEnd type="none"/>
           </a:ln>
         </p:spPr>
+        <p:txBody>
+          <a:bodyPr/>
+          <a:p/>
+        </p:txBody>
       </p:sp>
       <p:sp>
         <p:nvSpPr>
@@ -4230,6 +4426,10 @@
             <a:tailEnd type="none"/>
           </a:ln>
         </p:spPr>
+        <p:txBody>
+          <a:bodyPr/>
+          <a:p/>
+        </p:txBody>
       </p:sp>
       <p:sp>
         <p:nvSpPr>
@@ -4254,6 +4454,10 @@
             <a:tailEnd type="none"/>
           </a:ln>
         </p:spPr>
+        <p:txBody>
+          <a:bodyPr/>
+          <a:p/>
+        </p:txBody>
       </p:sp>
       <p:sp>
         <p:nvSpPr>
@@ -4278,6 +4482,10 @@
             <a:tailEnd type="none"/>
           </a:ln>
         </p:spPr>
+        <p:txBody>
+          <a:bodyPr/>
+          <a:p/>
+        </p:txBody>
       </p:sp>
       <p:sp>
         <p:nvSpPr>
@@ -4302,6 +4510,10 @@
             <a:tailEnd type="none"/>
           </a:ln>
         </p:spPr>
+        <p:txBody>
+          <a:bodyPr/>
+          <a:p/>
+        </p:txBody>
       </p:sp>
       <p:sp>
         <p:nvSpPr>
@@ -4326,6 +4538,10 @@
             <a:tailEnd type="none"/>
           </a:ln>
         </p:spPr>
+        <p:txBody>
+          <a:bodyPr/>
+          <a:p/>
+        </p:txBody>
       </p:sp>
       <p:sp>
         <p:nvSpPr>
@@ -4350,6 +4566,10 @@
             <a:tailEnd type="none"/>
           </a:ln>
         </p:spPr>
+        <p:txBody>
+          <a:bodyPr/>
+          <a:p/>
+        </p:txBody>
       </p:sp>
       <p:sp>
         <p:nvSpPr>
@@ -4374,6 +4594,10 @@
             <a:tailEnd type="none"/>
           </a:ln>
         </p:spPr>
+        <p:txBody>
+          <a:bodyPr/>
+          <a:p/>
+        </p:txBody>
       </p:sp>
       <p:sp>
         <p:nvSpPr>
@@ -4398,6 +4622,10 @@
             <a:tailEnd type="none"/>
           </a:ln>
         </p:spPr>
+        <p:txBody>
+          <a:bodyPr/>
+          <a:p/>
+        </p:txBody>
       </p:sp>
       <p:sp>
         <p:nvSpPr>
@@ -4422,6 +4650,10 @@
             <a:tailEnd type="none"/>
           </a:ln>
         </p:spPr>
+        <p:txBody>
+          <a:bodyPr/>
+          <a:p/>
+        </p:txBody>
       </p:sp>
       <p:sp>
         <p:nvSpPr>
@@ -4446,6 +4678,10 @@
             <a:tailEnd type="none"/>
           </a:ln>
         </p:spPr>
+        <p:txBody>
+          <a:bodyPr/>
+          <a:p/>
+        </p:txBody>
       </p:sp>
       <p:sp>
         <p:nvSpPr>
@@ -4470,6 +4706,10 @@
             <a:tailEnd type="none"/>
           </a:ln>
         </p:spPr>
+        <p:txBody>
+          <a:bodyPr/>
+          <a:p/>
+        </p:txBody>
       </p:sp>
       <p:sp>
         <p:nvSpPr>
@@ -4494,6 +4734,10 @@
             <a:tailEnd type="none"/>
           </a:ln>
         </p:spPr>
+        <p:txBody>
+          <a:bodyPr/>
+          <a:p/>
+        </p:txBody>
       </p:sp>
       <p:sp>
         <p:nvSpPr>
@@ -4518,6 +4762,10 @@
             <a:tailEnd type="none"/>
           </a:ln>
         </p:spPr>
+        <p:txBody>
+          <a:bodyPr/>
+          <a:p/>
+        </p:txBody>
       </p:sp>
       <p:sp>
         <p:nvSpPr>
@@ -4542,6 +4790,10 @@
             <a:tailEnd type="none"/>
           </a:ln>
         </p:spPr>
+        <p:txBody>
+          <a:bodyPr/>
+          <a:p/>
+        </p:txBody>
       </p:sp>
       <p:sp>
         <p:nvSpPr>
@@ -4566,6 +4818,10 @@
             <a:tailEnd type="none"/>
           </a:ln>
         </p:spPr>
+        <p:txBody>
+          <a:bodyPr/>
+          <a:p/>
+        </p:txBody>
       </p:sp>
       <p:sp>
         <p:nvSpPr>
@@ -4590,6 +4846,10 @@
             <a:tailEnd type="none"/>
           </a:ln>
         </p:spPr>
+        <p:txBody>
+          <a:bodyPr/>
+          <a:p/>
+        </p:txBody>
       </p:sp>
       <p:sp>
         <p:nvSpPr>
@@ -4614,6 +4874,10 @@
             <a:tailEnd type="none"/>
           </a:ln>
         </p:spPr>
+        <p:txBody>
+          <a:bodyPr/>
+          <a:p/>
+        </p:txBody>
       </p:sp>
       <p:sp>
         <p:nvSpPr>
@@ -4638,6 +4902,10 @@
             <a:tailEnd type="none"/>
           </a:ln>
         </p:spPr>
+        <p:txBody>
+          <a:bodyPr/>
+          <a:p/>
+        </p:txBody>
       </p:sp>
       <p:sp>
         <p:nvSpPr>
@@ -4662,6 +4930,10 @@
             <a:tailEnd type="none"/>
           </a:ln>
         </p:spPr>
+        <p:txBody>
+          <a:bodyPr/>
+          <a:p/>
+        </p:txBody>
       </p:sp>
       <p:sp>
         <p:nvSpPr>
@@ -4686,6 +4958,10 @@
             <a:tailEnd type="none"/>
           </a:ln>
         </p:spPr>
+        <p:txBody>
+          <a:bodyPr/>
+          <a:p/>
+        </p:txBody>
       </p:sp>
       <p:sp>
         <p:nvSpPr>
@@ -4710,6 +4986,10 @@
             <a:tailEnd type="none"/>
           </a:ln>
         </p:spPr>
+        <p:txBody>
+          <a:bodyPr/>
+          <a:p/>
+        </p:txBody>
       </p:sp>
       <p:sp>
         <p:nvSpPr>
@@ -4734,6 +5014,10 @@
             <a:tailEnd type="none"/>
           </a:ln>
         </p:spPr>
+        <p:txBody>
+          <a:bodyPr/>
+          <a:p/>
+        </p:txBody>
       </p:sp>
       <p:sp>
         <p:nvSpPr>
@@ -4758,6 +5042,10 @@
             <a:tailEnd type="none"/>
           </a:ln>
         </p:spPr>
+        <p:txBody>
+          <a:bodyPr/>
+          <a:p/>
+        </p:txBody>
       </p:sp>
       <p:sp>
         <p:nvSpPr>
@@ -4782,6 +5070,10 @@
             <a:tailEnd type="none"/>
           </a:ln>
         </p:spPr>
+        <p:txBody>
+          <a:bodyPr/>
+          <a:p/>
+        </p:txBody>
       </p:sp>
       <p:sp>
         <p:nvSpPr>
@@ -4806,6 +5098,10 @@
             <a:tailEnd type="none"/>
           </a:ln>
         </p:spPr>
+        <p:txBody>
+          <a:bodyPr/>
+          <a:p/>
+        </p:txBody>
       </p:sp>
       <p:sp>
         <p:nvSpPr>
@@ -4830,6 +5126,10 @@
             <a:tailEnd type="none"/>
           </a:ln>
         </p:spPr>
+        <p:txBody>
+          <a:bodyPr/>
+          <a:p/>
+        </p:txBody>
       </p:sp>
       <p:sp>
         <p:nvSpPr>
@@ -4854,6 +5154,10 @@
             <a:tailEnd type="none"/>
           </a:ln>
         </p:spPr>
+        <p:txBody>
+          <a:bodyPr/>
+          <a:p/>
+        </p:txBody>
       </p:sp>
       <p:sp>
         <p:nvSpPr>
@@ -4878,6 +5182,10 @@
             <a:tailEnd type="none"/>
           </a:ln>
         </p:spPr>
+        <p:txBody>
+          <a:bodyPr/>
+          <a:p/>
+        </p:txBody>
       </p:sp>
       <p:sp>
         <p:nvSpPr>
@@ -4902,6 +5210,10 @@
             <a:tailEnd type="none"/>
           </a:ln>
         </p:spPr>
+        <p:txBody>
+          <a:bodyPr/>
+          <a:p/>
+        </p:txBody>
       </p:sp>
       <p:sp>
         <p:nvSpPr>
@@ -4926,6 +5238,10 @@
             <a:tailEnd type="none"/>
           </a:ln>
         </p:spPr>
+        <p:txBody>
+          <a:bodyPr/>
+          <a:p/>
+        </p:txBody>
       </p:sp>
       <p:sp>
         <p:nvSpPr>
@@ -4950,6 +5266,10 @@
             <a:tailEnd type="none"/>
           </a:ln>
         </p:spPr>
+        <p:txBody>
+          <a:bodyPr/>
+          <a:p/>
+        </p:txBody>
       </p:sp>
       <p:sp>
         <p:nvSpPr>
@@ -4974,6 +5294,10 @@
             <a:tailEnd type="none"/>
           </a:ln>
         </p:spPr>
+        <p:txBody>
+          <a:bodyPr/>
+          <a:p/>
+        </p:txBody>
       </p:sp>
       <p:sp>
         <p:nvSpPr>
@@ -4998,6 +5322,10 @@
             <a:tailEnd type="none"/>
           </a:ln>
         </p:spPr>
+        <p:txBody>
+          <a:bodyPr/>
+          <a:p/>
+        </p:txBody>
       </p:sp>
       <p:sp>
         <p:nvSpPr>
@@ -5022,6 +5350,10 @@
             <a:tailEnd type="none"/>
           </a:ln>
         </p:spPr>
+        <p:txBody>
+          <a:bodyPr/>
+          <a:p/>
+        </p:txBody>
       </p:sp>
       <p:sp>
         <p:nvSpPr>
@@ -5046,6 +5378,10 @@
             <a:tailEnd type="none"/>
           </a:ln>
         </p:spPr>
+        <p:txBody>
+          <a:bodyPr/>
+          <a:p/>
+        </p:txBody>
       </p:sp>
       <p:sp>
         <p:nvSpPr>
@@ -5070,6 +5406,10 @@
             <a:tailEnd type="none"/>
           </a:ln>
         </p:spPr>
+        <p:txBody>
+          <a:bodyPr/>
+          <a:p/>
+        </p:txBody>
       </p:sp>
       <p:sp>
         <p:nvSpPr>
@@ -5094,6 +5434,10 @@
             <a:tailEnd type="none"/>
           </a:ln>
         </p:spPr>
+        <p:txBody>
+          <a:bodyPr/>
+          <a:p/>
+        </p:txBody>
       </p:sp>
       <p:sp>
         <p:nvSpPr>
@@ -5118,6 +5462,10 @@
             <a:tailEnd type="none"/>
           </a:ln>
         </p:spPr>
+        <p:txBody>
+          <a:bodyPr/>
+          <a:p/>
+        </p:txBody>
       </p:sp>
       <p:sp>
         <p:nvSpPr>
@@ -5142,6 +5490,10 @@
             <a:tailEnd type="none"/>
           </a:ln>
         </p:spPr>
+        <p:txBody>
+          <a:bodyPr/>
+          <a:p/>
+        </p:txBody>
       </p:sp>
       <p:sp>
         <p:nvSpPr>
@@ -5166,6 +5518,10 @@
             <a:tailEnd type="none"/>
           </a:ln>
         </p:spPr>
+        <p:txBody>
+          <a:bodyPr/>
+          <a:p/>
+        </p:txBody>
       </p:sp>
       <p:sp>
         <p:nvSpPr>
@@ -5190,6 +5546,10 @@
             <a:tailEnd type="none"/>
           </a:ln>
         </p:spPr>
+        <p:txBody>
+          <a:bodyPr/>
+          <a:p/>
+        </p:txBody>
       </p:sp>
       <p:sp>
         <p:nvSpPr>
@@ -5214,6 +5574,10 @@
             <a:tailEnd type="none"/>
           </a:ln>
         </p:spPr>
+        <p:txBody>
+          <a:bodyPr/>
+          <a:p/>
+        </p:txBody>
       </p:sp>
       <p:sp>
         <p:nvSpPr>
@@ -5238,6 +5602,10 @@
             <a:tailEnd type="none"/>
           </a:ln>
         </p:spPr>
+        <p:txBody>
+          <a:bodyPr/>
+          <a:p/>
+        </p:txBody>
       </p:sp>
       <p:sp>
         <p:nvSpPr>
@@ -5262,6 +5630,10 @@
             <a:tailEnd type="none"/>
           </a:ln>
         </p:spPr>
+        <p:txBody>
+          <a:bodyPr/>
+          <a:p/>
+        </p:txBody>
       </p:sp>
       <p:sp>
         <p:nvSpPr>
@@ -5286,6 +5658,10 @@
             <a:tailEnd type="none"/>
           </a:ln>
         </p:spPr>
+        <p:txBody>
+          <a:bodyPr/>
+          <a:p/>
+        </p:txBody>
       </p:sp>
       <p:sp>
         <p:nvSpPr>
@@ -5310,6 +5686,10 @@
             <a:tailEnd type="none"/>
           </a:ln>
         </p:spPr>
+        <p:txBody>
+          <a:bodyPr/>
+          <a:p/>
+        </p:txBody>
       </p:sp>
       <p:sp>
         <p:nvSpPr>
@@ -5334,6 +5714,10 @@
             <a:tailEnd type="none"/>
           </a:ln>
         </p:spPr>
+        <p:txBody>
+          <a:bodyPr/>
+          <a:p/>
+        </p:txBody>
       </p:sp>
       <p:sp>
         <p:nvSpPr>
@@ -5358,6 +5742,10 @@
             <a:tailEnd type="none"/>
           </a:ln>
         </p:spPr>
+        <p:txBody>
+          <a:bodyPr/>
+          <a:p/>
+        </p:txBody>
       </p:sp>
       <p:sp>
         <p:nvSpPr>
@@ -5382,6 +5770,10 @@
             <a:tailEnd type="none"/>
           </a:ln>
         </p:spPr>
+        <p:txBody>
+          <a:bodyPr/>
+          <a:p/>
+        </p:txBody>
       </p:sp>
       <p:sp>
         <p:nvSpPr>
@@ -5406,6 +5798,10 @@
             <a:tailEnd type="none"/>
           </a:ln>
         </p:spPr>
+        <p:txBody>
+          <a:bodyPr/>
+          <a:p/>
+        </p:txBody>
       </p:sp>
       <p:sp>
         <p:nvSpPr>
@@ -5430,6 +5826,10 @@
             <a:tailEnd type="none"/>
           </a:ln>
         </p:spPr>
+        <p:txBody>
+          <a:bodyPr/>
+          <a:p/>
+        </p:txBody>
       </p:sp>
       <p:sp>
         <p:nvSpPr>
@@ -5454,6 +5854,10 @@
             <a:tailEnd type="none"/>
           </a:ln>
         </p:spPr>
+        <p:txBody>
+          <a:bodyPr/>
+          <a:p/>
+        </p:txBody>
       </p:sp>
       <p:sp>
         <p:nvSpPr>
@@ -5478,6 +5882,10 @@
             <a:tailEnd type="none"/>
           </a:ln>
         </p:spPr>
+        <p:txBody>
+          <a:bodyPr/>
+          <a:p/>
+        </p:txBody>
       </p:sp>
       <p:sp>
         <p:nvSpPr>
@@ -5502,6 +5910,10 @@
             <a:tailEnd type="none"/>
           </a:ln>
         </p:spPr>
+        <p:txBody>
+          <a:bodyPr/>
+          <a:p/>
+        </p:txBody>
       </p:sp>
       <p:sp>
         <p:nvSpPr>
@@ -5526,6 +5938,10 @@
             <a:tailEnd type="none"/>
           </a:ln>
         </p:spPr>
+        <p:txBody>
+          <a:bodyPr/>
+          <a:p/>
+        </p:txBody>
       </p:sp>
       <p:sp>
         <p:nvSpPr>
@@ -5550,6 +5966,10 @@
             <a:tailEnd type="none"/>
           </a:ln>
         </p:spPr>
+        <p:txBody>
+          <a:bodyPr/>
+          <a:p/>
+        </p:txBody>
       </p:sp>
       <p:sp>
         <p:nvSpPr>
@@ -5574,6 +5994,10 @@
             <a:tailEnd type="none"/>
           </a:ln>
         </p:spPr>
+        <p:txBody>
+          <a:bodyPr/>
+          <a:p/>
+        </p:txBody>
       </p:sp>
       <p:sp>
         <p:nvSpPr>
@@ -5598,6 +6022,10 @@
             <a:tailEnd type="none"/>
           </a:ln>
         </p:spPr>
+        <p:txBody>
+          <a:bodyPr/>
+          <a:p/>
+        </p:txBody>
       </p:sp>
       <p:sp>
         <p:nvSpPr>
@@ -5622,6 +6050,10 @@
             <a:tailEnd type="none"/>
           </a:ln>
         </p:spPr>
+        <p:txBody>
+          <a:bodyPr/>
+          <a:p/>
+        </p:txBody>
       </p:sp>
       <p:sp>
         <p:nvSpPr>
@@ -5646,6 +6078,10 @@
             <a:tailEnd type="none"/>
           </a:ln>
         </p:spPr>
+        <p:txBody>
+          <a:bodyPr/>
+          <a:p/>
+        </p:txBody>
       </p:sp>
       <p:sp>
         <p:nvSpPr>
@@ -5670,6 +6106,10 @@
             <a:tailEnd type="none"/>
           </a:ln>
         </p:spPr>
+        <p:txBody>
+          <a:bodyPr/>
+          <a:p/>
+        </p:txBody>
       </p:sp>
       <p:sp>
         <p:nvSpPr>
@@ -5694,6 +6134,10 @@
             <a:tailEnd type="none"/>
           </a:ln>
         </p:spPr>
+        <p:txBody>
+          <a:bodyPr/>
+          <a:p/>
+        </p:txBody>
       </p:sp>
       <p:sp>
         <p:nvSpPr>
@@ -5718,6 +6162,10 @@
             <a:tailEnd type="none"/>
           </a:ln>
         </p:spPr>
+        <p:txBody>
+          <a:bodyPr/>
+          <a:p/>
+        </p:txBody>
       </p:sp>
       <p:sp>
         <p:nvSpPr>
@@ -5742,6 +6190,10 @@
             <a:tailEnd type="none"/>
           </a:ln>
         </p:spPr>
+        <p:txBody>
+          <a:bodyPr/>
+          <a:p/>
+        </p:txBody>
       </p:sp>
       <p:sp>
         <p:nvSpPr>
@@ -5766,6 +6218,10 @@
             <a:tailEnd type="none"/>
           </a:ln>
         </p:spPr>
+        <p:txBody>
+          <a:bodyPr/>
+          <a:p/>
+        </p:txBody>
       </p:sp>
       <p:sp>
         <p:nvSpPr>
@@ -5790,6 +6246,10 @@
             <a:tailEnd type="none"/>
           </a:ln>
         </p:spPr>
+        <p:txBody>
+          <a:bodyPr/>
+          <a:p/>
+        </p:txBody>
       </p:sp>
       <p:sp>
         <p:nvSpPr>
@@ -5814,6 +6274,10 @@
             <a:tailEnd type="none"/>
           </a:ln>
         </p:spPr>
+        <p:txBody>
+          <a:bodyPr/>
+          <a:p/>
+        </p:txBody>
       </p:sp>
       <p:sp>
         <p:nvSpPr>
@@ -5838,6 +6302,10 @@
             <a:tailEnd type="none"/>
           </a:ln>
         </p:spPr>
+        <p:txBody>
+          <a:bodyPr/>
+          <a:p/>
+        </p:txBody>
       </p:sp>
       <p:sp>
         <p:nvSpPr>
@@ -5862,6 +6330,10 @@
             <a:tailEnd type="none"/>
           </a:ln>
         </p:spPr>
+        <p:txBody>
+          <a:bodyPr/>
+          <a:p/>
+        </p:txBody>
       </p:sp>
       <p:sp>
         <p:nvSpPr>
@@ -5886,6 +6358,10 @@
             <a:tailEnd type="none"/>
           </a:ln>
         </p:spPr>
+        <p:txBody>
+          <a:bodyPr/>
+          <a:p/>
+        </p:txBody>
       </p:sp>
       <p:sp>
         <p:nvSpPr>
@@ -5910,6 +6386,10 @@
             <a:tailEnd type="none"/>
           </a:ln>
         </p:spPr>
+        <p:txBody>
+          <a:bodyPr/>
+          <a:p/>
+        </p:txBody>
       </p:sp>
       <p:sp>
         <p:nvSpPr>
@@ -5934,6 +6414,10 @@
             <a:tailEnd type="none"/>
           </a:ln>
         </p:spPr>
+        <p:txBody>
+          <a:bodyPr/>
+          <a:p/>
+        </p:txBody>
       </p:sp>
       <p:sp>
         <p:nvSpPr>
@@ -5958,6 +6442,10 @@
             <a:tailEnd type="none"/>
           </a:ln>
         </p:spPr>
+        <p:txBody>
+          <a:bodyPr/>
+          <a:p/>
+        </p:txBody>
       </p:sp>
       <p:sp>
         <p:nvSpPr>
@@ -5982,6 +6470,10 @@
             <a:tailEnd type="none"/>
           </a:ln>
         </p:spPr>
+        <p:txBody>
+          <a:bodyPr/>
+          <a:p/>
+        </p:txBody>
       </p:sp>
       <p:sp>
         <p:nvSpPr>
@@ -6006,6 +6498,10 @@
             <a:tailEnd type="none"/>
           </a:ln>
         </p:spPr>
+        <p:txBody>
+          <a:bodyPr/>
+          <a:p/>
+        </p:txBody>
       </p:sp>
       <p:sp>
         <p:nvSpPr>
@@ -6030,6 +6526,10 @@
             <a:tailEnd type="none"/>
           </a:ln>
         </p:spPr>
+        <p:txBody>
+          <a:bodyPr/>
+          <a:p/>
+        </p:txBody>
       </p:sp>
       <p:sp>
         <p:nvSpPr>
@@ -6054,6 +6554,10 @@
             <a:tailEnd type="none"/>
           </a:ln>
         </p:spPr>
+        <p:txBody>
+          <a:bodyPr/>
+          <a:p/>
+        </p:txBody>
       </p:sp>
       <p:sp>
         <p:nvSpPr>
@@ -6078,6 +6582,10 @@
             <a:tailEnd type="none"/>
           </a:ln>
         </p:spPr>
+        <p:txBody>
+          <a:bodyPr/>
+          <a:p/>
+        </p:txBody>
       </p:sp>
       <p:sp>
         <p:nvSpPr>
@@ -6102,6 +6610,10 @@
             <a:tailEnd type="none"/>
           </a:ln>
         </p:spPr>
+        <p:txBody>
+          <a:bodyPr/>
+          <a:p/>
+        </p:txBody>
       </p:sp>
       <p:sp>
         <p:nvSpPr>
@@ -6126,6 +6638,10 @@
             <a:tailEnd type="none"/>
           </a:ln>
         </p:spPr>
+        <p:txBody>
+          <a:bodyPr/>
+          <a:p/>
+        </p:txBody>
       </p:sp>
       <p:sp>
         <p:nvSpPr>
@@ -6150,6 +6666,10 @@
             <a:tailEnd type="none"/>
           </a:ln>
         </p:spPr>
+        <p:txBody>
+          <a:bodyPr/>
+          <a:p/>
+        </p:txBody>
       </p:sp>
       <p:sp>
         <p:nvSpPr>
@@ -6174,6 +6694,10 @@
             <a:tailEnd type="none"/>
           </a:ln>
         </p:spPr>
+        <p:txBody>
+          <a:bodyPr/>
+          <a:p/>
+        </p:txBody>
       </p:sp>
       <p:sp>
         <p:nvSpPr>
@@ -6198,6 +6722,10 @@
             <a:tailEnd type="none"/>
           </a:ln>
         </p:spPr>
+        <p:txBody>
+          <a:bodyPr/>
+          <a:p/>
+        </p:txBody>
       </p:sp>
       <p:sp>
         <p:nvSpPr>
@@ -6222,6 +6750,10 @@
             <a:tailEnd type="none"/>
           </a:ln>
         </p:spPr>
+        <p:txBody>
+          <a:bodyPr/>
+          <a:p/>
+        </p:txBody>
       </p:sp>
       <p:sp>
         <p:nvSpPr>
@@ -6246,6 +6778,10 @@
             <a:tailEnd type="none"/>
           </a:ln>
         </p:spPr>
+        <p:txBody>
+          <a:bodyPr/>
+          <a:p/>
+        </p:txBody>
       </p:sp>
       <p:sp>
         <p:nvSpPr>
@@ -6270,6 +6806,10 @@
             <a:tailEnd type="none"/>
           </a:ln>
         </p:spPr>
+        <p:txBody>
+          <a:bodyPr/>
+          <a:p/>
+        </p:txBody>
       </p:sp>
       <p:sp>
         <p:nvSpPr>
@@ -6294,6 +6834,10 @@
             <a:tailEnd type="none"/>
           </a:ln>
         </p:spPr>
+        <p:txBody>
+          <a:bodyPr/>
+          <a:p/>
+        </p:txBody>
       </p:sp>
       <p:sp>
         <p:nvSpPr>
@@ -6318,6 +6862,10 @@
             <a:tailEnd type="none"/>
           </a:ln>
         </p:spPr>
+        <p:txBody>
+          <a:bodyPr/>
+          <a:p/>
+        </p:txBody>
       </p:sp>
       <p:sp>
         <p:nvSpPr>
@@ -6342,6 +6890,10 @@
             <a:tailEnd type="none"/>
           </a:ln>
         </p:spPr>
+        <p:txBody>
+          <a:bodyPr/>
+          <a:p/>
+        </p:txBody>
       </p:sp>
       <p:sp>
         <p:nvSpPr>
@@ -6366,6 +6918,10 @@
             <a:tailEnd type="none"/>
           </a:ln>
         </p:spPr>
+        <p:txBody>
+          <a:bodyPr/>
+          <a:p/>
+        </p:txBody>
       </p:sp>
       <p:sp>
         <p:nvSpPr>
@@ -6390,6 +6946,10 @@
             <a:tailEnd type="none"/>
           </a:ln>
         </p:spPr>
+        <p:txBody>
+          <a:bodyPr/>
+          <a:p/>
+        </p:txBody>
       </p:sp>
       <p:sp>
         <p:nvSpPr>
@@ -6414,6 +6974,10 @@
             <a:tailEnd type="none"/>
           </a:ln>
         </p:spPr>
+        <p:txBody>
+          <a:bodyPr/>
+          <a:p/>
+        </p:txBody>
       </p:sp>
       <p:sp>
         <p:nvSpPr>
@@ -6438,6 +7002,10 @@
             <a:tailEnd type="none"/>
           </a:ln>
         </p:spPr>
+        <p:txBody>
+          <a:bodyPr/>
+          <a:p/>
+        </p:txBody>
       </p:sp>
       <p:sp>
         <p:nvSpPr>
@@ -6462,6 +7030,10 @@
             <a:tailEnd type="none"/>
           </a:ln>
         </p:spPr>
+        <p:txBody>
+          <a:bodyPr/>
+          <a:p/>
+        </p:txBody>
       </p:sp>
       <p:sp>
         <p:nvSpPr>
@@ -6486,6 +7058,10 @@
             <a:tailEnd type="none"/>
           </a:ln>
         </p:spPr>
+        <p:txBody>
+          <a:bodyPr/>
+          <a:p/>
+        </p:txBody>
       </p:sp>
       <p:sp>
         <p:nvSpPr>
@@ -6510,6 +7086,10 @@
             <a:tailEnd type="none"/>
           </a:ln>
         </p:spPr>
+        <p:txBody>
+          <a:bodyPr/>
+          <a:p/>
+        </p:txBody>
       </p:sp>
       <p:sp>
         <p:nvSpPr>
@@ -6534,6 +7114,10 @@
             <a:tailEnd type="none"/>
           </a:ln>
         </p:spPr>
+        <p:txBody>
+          <a:bodyPr/>
+          <a:p/>
+        </p:txBody>
       </p:sp>
       <p:sp>
         <p:nvSpPr>
@@ -6558,6 +7142,10 @@
             <a:tailEnd type="none"/>
           </a:ln>
         </p:spPr>
+        <p:txBody>
+          <a:bodyPr/>
+          <a:p/>
+        </p:txBody>
       </p:sp>
       <p:sp>
         <p:nvSpPr>
@@ -6582,6 +7170,10 @@
             <a:tailEnd type="none"/>
           </a:ln>
         </p:spPr>
+        <p:txBody>
+          <a:bodyPr/>
+          <a:p/>
+        </p:txBody>
       </p:sp>
       <p:sp>
         <p:nvSpPr>
@@ -6606,6 +7198,10 @@
             <a:tailEnd type="none"/>
           </a:ln>
         </p:spPr>
+        <p:txBody>
+          <a:bodyPr/>
+          <a:p/>
+        </p:txBody>
       </p:sp>
       <p:sp>
         <p:nvSpPr>
@@ -6630,6 +7226,10 @@
             <a:tailEnd type="none"/>
           </a:ln>
         </p:spPr>
+        <p:txBody>
+          <a:bodyPr/>
+          <a:p/>
+        </p:txBody>
       </p:sp>
       <p:sp>
         <p:nvSpPr>
@@ -6654,6 +7254,10 @@
             <a:tailEnd type="none"/>
           </a:ln>
         </p:spPr>
+        <p:txBody>
+          <a:bodyPr/>
+          <a:p/>
+        </p:txBody>
       </p:sp>
       <p:sp>
         <p:nvSpPr>
@@ -6678,6 +7282,10 @@
             <a:tailEnd type="none"/>
           </a:ln>
         </p:spPr>
+        <p:txBody>
+          <a:bodyPr/>
+          <a:p/>
+        </p:txBody>
       </p:sp>
       <p:sp>
         <p:nvSpPr>
@@ -6702,6 +7310,10 @@
             <a:tailEnd type="none"/>
           </a:ln>
         </p:spPr>
+        <p:txBody>
+          <a:bodyPr/>
+          <a:p/>
+        </p:txBody>
       </p:sp>
       <p:sp>
         <p:nvSpPr>
@@ -6726,6 +7338,10 @@
             <a:tailEnd type="none"/>
           </a:ln>
         </p:spPr>
+        <p:txBody>
+          <a:bodyPr/>
+          <a:p/>
+        </p:txBody>
       </p:sp>
       <p:sp>
         <p:nvSpPr>
@@ -6750,6 +7366,10 @@
             <a:tailEnd type="none"/>
           </a:ln>
         </p:spPr>
+        <p:txBody>
+          <a:bodyPr/>
+          <a:p/>
+        </p:txBody>
       </p:sp>
       <p:sp>
         <p:nvSpPr>
@@ -6774,6 +7394,10 @@
             <a:tailEnd type="none"/>
           </a:ln>
         </p:spPr>
+        <p:txBody>
+          <a:bodyPr/>
+          <a:p/>
+        </p:txBody>
       </p:sp>
       <p:sp>
         <p:nvSpPr>
@@ -6798,6 +7422,10 @@
             <a:tailEnd type="none"/>
           </a:ln>
         </p:spPr>
+        <p:txBody>
+          <a:bodyPr/>
+          <a:p/>
+        </p:txBody>
       </p:sp>
       <p:sp>
         <p:nvSpPr>
@@ -6822,6 +7450,10 @@
             <a:tailEnd type="none"/>
           </a:ln>
         </p:spPr>
+        <p:txBody>
+          <a:bodyPr/>
+          <a:p/>
+        </p:txBody>
       </p:sp>
       <p:sp>
         <p:nvSpPr>
@@ -6846,6 +7478,10 @@
             <a:tailEnd type="none"/>
           </a:ln>
         </p:spPr>
+        <p:txBody>
+          <a:bodyPr/>
+          <a:p/>
+        </p:txBody>
       </p:sp>
       <p:sp>
         <p:nvSpPr>
@@ -6870,6 +7506,10 @@
             <a:tailEnd type="none"/>
           </a:ln>
         </p:spPr>
+        <p:txBody>
+          <a:bodyPr/>
+          <a:p/>
+        </p:txBody>
       </p:sp>
       <p:sp>
         <p:nvSpPr>
@@ -6894,6 +7534,10 @@
             <a:tailEnd type="none"/>
           </a:ln>
         </p:spPr>
+        <p:txBody>
+          <a:bodyPr/>
+          <a:p/>
+        </p:txBody>
       </p:sp>
       <p:sp>
         <p:nvSpPr>
@@ -6918,6 +7562,10 @@
             <a:tailEnd type="none"/>
           </a:ln>
         </p:spPr>
+        <p:txBody>
+          <a:bodyPr/>
+          <a:p/>
+        </p:txBody>
       </p:sp>
       <p:sp>
         <p:nvSpPr>
@@ -6942,6 +7590,10 @@
             <a:tailEnd type="none"/>
           </a:ln>
         </p:spPr>
+        <p:txBody>
+          <a:bodyPr/>
+          <a:p/>
+        </p:txBody>
       </p:sp>
       <p:sp>
         <p:nvSpPr>
@@ -6966,6 +7618,10 @@
             <a:tailEnd type="none"/>
           </a:ln>
         </p:spPr>
+        <p:txBody>
+          <a:bodyPr/>
+          <a:p/>
+        </p:txBody>
       </p:sp>
       <p:sp>
         <p:nvSpPr>
@@ -6990,6 +7646,10 @@
             <a:tailEnd type="none"/>
           </a:ln>
         </p:spPr>
+        <p:txBody>
+          <a:bodyPr/>
+          <a:p/>
+        </p:txBody>
       </p:sp>
       <p:sp>
         <p:nvSpPr>
@@ -7014,6 +7674,10 @@
             <a:tailEnd type="none"/>
           </a:ln>
         </p:spPr>
+        <p:txBody>
+          <a:bodyPr/>
+          <a:p/>
+        </p:txBody>
       </p:sp>
       <p:sp>
         <p:nvSpPr>
@@ -7038,6 +7702,10 @@
             <a:tailEnd type="none"/>
           </a:ln>
         </p:spPr>
+        <p:txBody>
+          <a:bodyPr/>
+          <a:p/>
+        </p:txBody>
       </p:sp>
       <p:sp>
         <p:nvSpPr>
@@ -7062,6 +7730,10 @@
             <a:tailEnd type="none"/>
           </a:ln>
         </p:spPr>
+        <p:txBody>
+          <a:bodyPr/>
+          <a:p/>
+        </p:txBody>
       </p:sp>
       <p:sp>
         <p:nvSpPr>
@@ -7086,6 +7758,10 @@
             <a:tailEnd type="none"/>
           </a:ln>
         </p:spPr>
+        <p:txBody>
+          <a:bodyPr/>
+          <a:p/>
+        </p:txBody>
       </p:sp>
       <p:sp>
         <p:nvSpPr>
@@ -7110,6 +7786,10 @@
             <a:tailEnd type="none"/>
           </a:ln>
         </p:spPr>
+        <p:txBody>
+          <a:bodyPr/>
+          <a:p/>
+        </p:txBody>
       </p:sp>
       <p:sp>
         <p:nvSpPr>
@@ -7134,6 +7814,10 @@
             <a:tailEnd type="none"/>
           </a:ln>
         </p:spPr>
+        <p:txBody>
+          <a:bodyPr/>
+          <a:p/>
+        </p:txBody>
       </p:sp>
       <p:sp>
         <p:nvSpPr>
@@ -7158,6 +7842,10 @@
             <a:tailEnd type="none"/>
           </a:ln>
         </p:spPr>
+        <p:txBody>
+          <a:bodyPr/>
+          <a:p/>
+        </p:txBody>
       </p:sp>
       <p:sp>
         <p:nvSpPr>
@@ -7182,6 +7870,10 @@
             <a:tailEnd type="none"/>
           </a:ln>
         </p:spPr>
+        <p:txBody>
+          <a:bodyPr/>
+          <a:p/>
+        </p:txBody>
       </p:sp>
       <p:sp>
         <p:nvSpPr>
@@ -7206,6 +7898,10 @@
             <a:tailEnd type="none"/>
           </a:ln>
         </p:spPr>
+        <p:txBody>
+          <a:bodyPr/>
+          <a:p/>
+        </p:txBody>
       </p:sp>
       <p:sp>
         <p:nvSpPr>
@@ -7230,6 +7926,10 @@
             <a:tailEnd type="none"/>
           </a:ln>
         </p:spPr>
+        <p:txBody>
+          <a:bodyPr/>
+          <a:p/>
+        </p:txBody>
       </p:sp>
       <p:sp>
         <p:nvSpPr>
@@ -7254,6 +7954,10 @@
             <a:tailEnd type="none"/>
           </a:ln>
         </p:spPr>
+        <p:txBody>
+          <a:bodyPr/>
+          <a:p/>
+        </p:txBody>
       </p:sp>
       <p:sp>
         <p:nvSpPr>
@@ -7278,6 +7982,10 @@
             <a:tailEnd type="none"/>
           </a:ln>
         </p:spPr>
+        <p:txBody>
+          <a:bodyPr/>
+          <a:p/>
+        </p:txBody>
       </p:sp>
       <p:sp>
         <p:nvSpPr>
@@ -7302,6 +8010,10 @@
             <a:tailEnd type="none"/>
           </a:ln>
         </p:spPr>
+        <p:txBody>
+          <a:bodyPr/>
+          <a:p/>
+        </p:txBody>
       </p:sp>
       <p:sp>
         <p:nvSpPr>
@@ -7326,6 +8038,10 @@
             <a:tailEnd type="none"/>
           </a:ln>
         </p:spPr>
+        <p:txBody>
+          <a:bodyPr/>
+          <a:p/>
+        </p:txBody>
       </p:sp>
       <p:sp>
         <p:nvSpPr>
@@ -7350,6 +8066,10 @@
             <a:tailEnd type="none"/>
           </a:ln>
         </p:spPr>
+        <p:txBody>
+          <a:bodyPr/>
+          <a:p/>
+        </p:txBody>
       </p:sp>
       <p:sp>
         <p:nvSpPr>
@@ -7374,6 +8094,10 @@
             <a:tailEnd type="none"/>
           </a:ln>
         </p:spPr>
+        <p:txBody>
+          <a:bodyPr/>
+          <a:p/>
+        </p:txBody>
       </p:sp>
       <p:sp>
         <p:nvSpPr>
@@ -7398,6 +8122,10 @@
             <a:tailEnd type="none"/>
           </a:ln>
         </p:spPr>
+        <p:txBody>
+          <a:bodyPr/>
+          <a:p/>
+        </p:txBody>
       </p:sp>
       <p:sp>
         <p:nvSpPr>
@@ -7422,6 +8150,10 @@
             <a:tailEnd type="none"/>
           </a:ln>
         </p:spPr>
+        <p:txBody>
+          <a:bodyPr/>
+          <a:p/>
+        </p:txBody>
       </p:sp>
       <p:sp>
         <p:nvSpPr>
@@ -7446,6 +8178,10 @@
             <a:tailEnd type="none"/>
           </a:ln>
         </p:spPr>
+        <p:txBody>
+          <a:bodyPr/>
+          <a:p/>
+        </p:txBody>
       </p:sp>
       <p:sp>
         <p:nvSpPr>
@@ -7470,6 +8206,10 @@
             <a:tailEnd type="none"/>
           </a:ln>
         </p:spPr>
+        <p:txBody>
+          <a:bodyPr/>
+          <a:p/>
+        </p:txBody>
       </p:sp>
       <p:sp>
         <p:nvSpPr>
@@ -7494,6 +8234,10 @@
             <a:tailEnd type="none"/>
           </a:ln>
         </p:spPr>
+        <p:txBody>
+          <a:bodyPr/>
+          <a:p/>
+        </p:txBody>
       </p:sp>
       <p:sp>
         <p:nvSpPr>
@@ -7518,6 +8262,10 @@
             <a:tailEnd type="none"/>
           </a:ln>
         </p:spPr>
+        <p:txBody>
+          <a:bodyPr/>
+          <a:p/>
+        </p:txBody>
       </p:sp>
       <p:sp>
         <p:nvSpPr>
@@ -7542,6 +8290,10 @@
             <a:tailEnd type="none"/>
           </a:ln>
         </p:spPr>
+        <p:txBody>
+          <a:bodyPr/>
+          <a:p/>
+        </p:txBody>
       </p:sp>
       <p:sp>
         <p:nvSpPr>
@@ -7566,6 +8318,10 @@
             <a:tailEnd type="none"/>
           </a:ln>
         </p:spPr>
+        <p:txBody>
+          <a:bodyPr/>
+          <a:p/>
+        </p:txBody>
       </p:sp>
       <p:sp>
         <p:nvSpPr>
@@ -7590,6 +8346,10 @@
             <a:tailEnd type="none"/>
           </a:ln>
         </p:spPr>
+        <p:txBody>
+          <a:bodyPr/>
+          <a:p/>
+        </p:txBody>
       </p:sp>
       <p:sp>
         <p:nvSpPr>
@@ -7614,6 +8374,10 @@
             <a:tailEnd type="none"/>
           </a:ln>
         </p:spPr>
+        <p:txBody>
+          <a:bodyPr/>
+          <a:p/>
+        </p:txBody>
       </p:sp>
       <p:sp>
         <p:nvSpPr>
@@ -7638,6 +8402,10 @@
             <a:tailEnd type="none"/>
           </a:ln>
         </p:spPr>
+        <p:txBody>
+          <a:bodyPr/>
+          <a:p/>
+        </p:txBody>
       </p:sp>
       <p:sp>
         <p:nvSpPr>
@@ -7662,6 +8430,10 @@
             <a:tailEnd type="none"/>
           </a:ln>
         </p:spPr>
+        <p:txBody>
+          <a:bodyPr/>
+          <a:p/>
+        </p:txBody>
       </p:sp>
       <p:sp>
         <p:nvSpPr>
@@ -7686,6 +8458,10 @@
             <a:tailEnd type="none"/>
           </a:ln>
         </p:spPr>
+        <p:txBody>
+          <a:bodyPr/>
+          <a:p/>
+        </p:txBody>
       </p:sp>
       <p:sp>
         <p:nvSpPr>
@@ -7710,6 +8486,10 @@
             <a:tailEnd type="none"/>
           </a:ln>
         </p:spPr>
+        <p:txBody>
+          <a:bodyPr/>
+          <a:p/>
+        </p:txBody>
       </p:sp>
       <p:sp>
         <p:nvSpPr>
@@ -7734,6 +8514,10 @@
             <a:tailEnd type="none"/>
           </a:ln>
         </p:spPr>
+        <p:txBody>
+          <a:bodyPr/>
+          <a:p/>
+        </p:txBody>
       </p:sp>
       <p:sp>
         <p:nvSpPr>
@@ -7758,6 +8542,10 @@
             <a:tailEnd type="none"/>
           </a:ln>
         </p:spPr>
+        <p:txBody>
+          <a:bodyPr/>
+          <a:p/>
+        </p:txBody>
       </p:sp>
       <p:sp>
         <p:nvSpPr>
@@ -7782,6 +8570,10 @@
             <a:tailEnd type="none"/>
           </a:ln>
         </p:spPr>
+        <p:txBody>
+          <a:bodyPr/>
+          <a:p/>
+        </p:txBody>
       </p:sp>
       <p:sp>
         <p:nvSpPr>
@@ -7806,6 +8598,10 @@
             <a:tailEnd type="none"/>
           </a:ln>
         </p:spPr>
+        <p:txBody>
+          <a:bodyPr/>
+          <a:p/>
+        </p:txBody>
       </p:sp>
       <p:sp>
         <p:nvSpPr>
@@ -7830,6 +8626,10 @@
             <a:tailEnd type="none"/>
           </a:ln>
         </p:spPr>
+        <p:txBody>
+          <a:bodyPr/>
+          <a:p/>
+        </p:txBody>
       </p:sp>
       <p:sp>
         <p:nvSpPr>
@@ -7854,6 +8654,10 @@
             <a:tailEnd type="none"/>
           </a:ln>
         </p:spPr>
+        <p:txBody>
+          <a:bodyPr/>
+          <a:p/>
+        </p:txBody>
       </p:sp>
       <p:sp>
         <p:nvSpPr>
@@ -7878,6 +8682,10 @@
             <a:tailEnd type="none"/>
           </a:ln>
         </p:spPr>
+        <p:txBody>
+          <a:bodyPr/>
+          <a:p/>
+        </p:txBody>
       </p:sp>
       <p:sp>
         <p:nvSpPr>
@@ -7902,6 +8710,10 @@
             <a:tailEnd type="none"/>
           </a:ln>
         </p:spPr>
+        <p:txBody>
+          <a:bodyPr/>
+          <a:p/>
+        </p:txBody>
       </p:sp>
       <p:sp>
         <p:nvSpPr>
@@ -7926,6 +8738,10 @@
             <a:tailEnd type="none"/>
           </a:ln>
         </p:spPr>
+        <p:txBody>
+          <a:bodyPr/>
+          <a:p/>
+        </p:txBody>
       </p:sp>
       <p:sp>
         <p:nvSpPr>
@@ -7950,6 +8766,10 @@
             <a:tailEnd type="none"/>
           </a:ln>
         </p:spPr>
+        <p:txBody>
+          <a:bodyPr/>
+          <a:p/>
+        </p:txBody>
       </p:sp>
       <p:sp>
         <p:nvSpPr>
@@ -7974,6 +8794,10 @@
             <a:tailEnd type="none"/>
           </a:ln>
         </p:spPr>
+        <p:txBody>
+          <a:bodyPr/>
+          <a:p/>
+        </p:txBody>
       </p:sp>
       <p:sp>
         <p:nvSpPr>
@@ -7998,6 +8822,10 @@
             <a:tailEnd type="none"/>
           </a:ln>
         </p:spPr>
+        <p:txBody>
+          <a:bodyPr/>
+          <a:p/>
+        </p:txBody>
       </p:sp>
       <p:sp>
         <p:nvSpPr>
@@ -8022,6 +8850,10 @@
             <a:tailEnd type="none"/>
           </a:ln>
         </p:spPr>
+        <p:txBody>
+          <a:bodyPr/>
+          <a:p/>
+        </p:txBody>
       </p:sp>
       <p:sp>
         <p:nvSpPr>
@@ -8046,6 +8878,10 @@
             <a:tailEnd type="none"/>
           </a:ln>
         </p:spPr>
+        <p:txBody>
+          <a:bodyPr/>
+          <a:p/>
+        </p:txBody>
       </p:sp>
       <p:sp>
         <p:nvSpPr>
@@ -8070,6 +8906,10 @@
             <a:tailEnd type="none"/>
           </a:ln>
         </p:spPr>
+        <p:txBody>
+          <a:bodyPr/>
+          <a:p/>
+        </p:txBody>
       </p:sp>
       <p:sp>
         <p:nvSpPr>
@@ -8094,6 +8934,10 @@
             <a:tailEnd type="none"/>
           </a:ln>
         </p:spPr>
+        <p:txBody>
+          <a:bodyPr/>
+          <a:p/>
+        </p:txBody>
       </p:sp>
       <p:sp>
         <p:nvSpPr>
@@ -8118,6 +8962,10 @@
             <a:tailEnd type="none"/>
           </a:ln>
         </p:spPr>
+        <p:txBody>
+          <a:bodyPr/>
+          <a:p/>
+        </p:txBody>
       </p:sp>
       <p:sp>
         <p:nvSpPr>
@@ -8142,6 +8990,10 @@
             <a:tailEnd type="none"/>
           </a:ln>
         </p:spPr>
+        <p:txBody>
+          <a:bodyPr/>
+          <a:p/>
+        </p:txBody>
       </p:sp>
       <p:sp>
         <p:nvSpPr>
@@ -8166,6 +9018,10 @@
             <a:tailEnd type="none"/>
           </a:ln>
         </p:spPr>
+        <p:txBody>
+          <a:bodyPr/>
+          <a:p/>
+        </p:txBody>
       </p:sp>
       <p:sp>
         <p:nvSpPr>
@@ -8190,6 +9046,10 @@
             <a:tailEnd type="none"/>
           </a:ln>
         </p:spPr>
+        <p:txBody>
+          <a:bodyPr/>
+          <a:p/>
+        </p:txBody>
       </p:sp>
       <p:sp>
         <p:nvSpPr>
@@ -8214,6 +9074,10 @@
             <a:tailEnd type="none"/>
           </a:ln>
         </p:spPr>
+        <p:txBody>
+          <a:bodyPr/>
+          <a:p/>
+        </p:txBody>
       </p:sp>
       <p:sp>
         <p:nvSpPr>
@@ -8238,6 +9102,10 @@
             <a:tailEnd type="none"/>
           </a:ln>
         </p:spPr>
+        <p:txBody>
+          <a:bodyPr/>
+          <a:p/>
+        </p:txBody>
       </p:sp>
       <p:sp>
         <p:nvSpPr>
@@ -8262,6 +9130,10 @@
             <a:tailEnd type="none"/>
           </a:ln>
         </p:spPr>
+        <p:txBody>
+          <a:bodyPr/>
+          <a:p/>
+        </p:txBody>
       </p:sp>
       <p:sp>
         <p:nvSpPr>
@@ -8286,6 +9158,10 @@
             <a:tailEnd type="none"/>
           </a:ln>
         </p:spPr>
+        <p:txBody>
+          <a:bodyPr/>
+          <a:p/>
+        </p:txBody>
       </p:sp>
       <p:sp>
         <p:nvSpPr>
@@ -8310,6 +9186,10 @@
             <a:tailEnd type="none"/>
           </a:ln>
         </p:spPr>
+        <p:txBody>
+          <a:bodyPr/>
+          <a:p/>
+        </p:txBody>
       </p:sp>
       <p:sp>
         <p:nvSpPr>
@@ -8334,6 +9214,10 @@
             <a:tailEnd type="none"/>
           </a:ln>
         </p:spPr>
+        <p:txBody>
+          <a:bodyPr/>
+          <a:p/>
+        </p:txBody>
       </p:sp>
       <p:sp>
         <p:nvSpPr>
@@ -8358,6 +9242,10 @@
             <a:tailEnd type="none"/>
           </a:ln>
         </p:spPr>
+        <p:txBody>
+          <a:bodyPr/>
+          <a:p/>
+        </p:txBody>
       </p:sp>
       <p:sp>
         <p:nvSpPr>
@@ -8382,6 +9270,10 @@
             <a:tailEnd type="none"/>
           </a:ln>
         </p:spPr>
+        <p:txBody>
+          <a:bodyPr/>
+          <a:p/>
+        </p:txBody>
       </p:sp>
       <p:sp>
         <p:nvSpPr>
@@ -8406,6 +9298,10 @@
             <a:tailEnd type="none"/>
           </a:ln>
         </p:spPr>
+        <p:txBody>
+          <a:bodyPr/>
+          <a:p/>
+        </p:txBody>
       </p:sp>
       <p:sp>
         <p:nvSpPr>
@@ -8430,6 +9326,10 @@
             <a:tailEnd type="none"/>
           </a:ln>
         </p:spPr>
+        <p:txBody>
+          <a:bodyPr/>
+          <a:p/>
+        </p:txBody>
       </p:sp>
       <p:sp>
         <p:nvSpPr>
@@ -8454,6 +9354,10 @@
             <a:tailEnd type="none"/>
           </a:ln>
         </p:spPr>
+        <p:txBody>
+          <a:bodyPr/>
+          <a:p/>
+        </p:txBody>
       </p:sp>
       <p:sp>
         <p:nvSpPr>
@@ -8478,6 +9382,10 @@
             <a:tailEnd type="none"/>
           </a:ln>
         </p:spPr>
+        <p:txBody>
+          <a:bodyPr/>
+          <a:p/>
+        </p:txBody>
       </p:sp>
       <p:sp>
         <p:nvSpPr>
@@ -8502,6 +9410,10 @@
             <a:tailEnd type="none"/>
           </a:ln>
         </p:spPr>
+        <p:txBody>
+          <a:bodyPr/>
+          <a:p/>
+        </p:txBody>
       </p:sp>
       <p:sp>
         <p:nvSpPr>
@@ -8526,6 +9438,10 @@
             <a:tailEnd type="none"/>
           </a:ln>
         </p:spPr>
+        <p:txBody>
+          <a:bodyPr/>
+          <a:p/>
+        </p:txBody>
       </p:sp>
       <p:sp>
         <p:nvSpPr>
@@ -8550,6 +9466,10 @@
             <a:tailEnd type="none"/>
           </a:ln>
         </p:spPr>
+        <p:txBody>
+          <a:bodyPr/>
+          <a:p/>
+        </p:txBody>
       </p:sp>
       <p:sp>
         <p:nvSpPr>
@@ -8574,6 +9494,10 @@
             <a:tailEnd type="none"/>
           </a:ln>
         </p:spPr>
+        <p:txBody>
+          <a:bodyPr/>
+          <a:p/>
+        </p:txBody>
       </p:sp>
       <p:sp>
         <p:nvSpPr>
@@ -8598,6 +9522,10 @@
             <a:tailEnd type="none"/>
           </a:ln>
         </p:spPr>
+        <p:txBody>
+          <a:bodyPr/>
+          <a:p/>
+        </p:txBody>
       </p:sp>
       <p:sp>
         <p:nvSpPr>
@@ -8622,6 +9550,10 @@
             <a:tailEnd type="none"/>
           </a:ln>
         </p:spPr>
+        <p:txBody>
+          <a:bodyPr/>
+          <a:p/>
+        </p:txBody>
       </p:sp>
       <p:sp>
         <p:nvSpPr>
@@ -8646,6 +9578,10 @@
             <a:tailEnd type="none"/>
           </a:ln>
         </p:spPr>
+        <p:txBody>
+          <a:bodyPr/>
+          <a:p/>
+        </p:txBody>
       </p:sp>
       <p:sp>
         <p:nvSpPr>
@@ -8670,6 +9606,10 @@
             <a:tailEnd type="none"/>
           </a:ln>
         </p:spPr>
+        <p:txBody>
+          <a:bodyPr/>
+          <a:p/>
+        </p:txBody>
       </p:sp>
       <p:sp>
         <p:nvSpPr>
@@ -8694,6 +9634,10 @@
             <a:tailEnd type="none"/>
           </a:ln>
         </p:spPr>
+        <p:txBody>
+          <a:bodyPr/>
+          <a:p/>
+        </p:txBody>
       </p:sp>
       <p:sp>
         <p:nvSpPr>
@@ -8718,6 +9662,10 @@
             <a:tailEnd type="none"/>
           </a:ln>
         </p:spPr>
+        <p:txBody>
+          <a:bodyPr/>
+          <a:p/>
+        </p:txBody>
       </p:sp>
       <p:sp>
         <p:nvSpPr>
@@ -8742,6 +9690,10 @@
             <a:tailEnd type="none"/>
           </a:ln>
         </p:spPr>
+        <p:txBody>
+          <a:bodyPr/>
+          <a:p/>
+        </p:txBody>
       </p:sp>
       <p:sp>
         <p:nvSpPr>
@@ -8766,6 +9718,10 @@
             <a:tailEnd type="none"/>
           </a:ln>
         </p:spPr>
+        <p:txBody>
+          <a:bodyPr/>
+          <a:p/>
+        </p:txBody>
       </p:sp>
       <p:sp>
         <p:nvSpPr>
@@ -8790,6 +9746,10 @@
             <a:tailEnd type="none"/>
           </a:ln>
         </p:spPr>
+        <p:txBody>
+          <a:bodyPr/>
+          <a:p/>
+        </p:txBody>
       </p:sp>
       <p:sp>
         <p:nvSpPr>
@@ -8814,6 +9774,10 @@
             <a:tailEnd type="none"/>
           </a:ln>
         </p:spPr>
+        <p:txBody>
+          <a:bodyPr/>
+          <a:p/>
+        </p:txBody>
       </p:sp>
       <p:sp>
         <p:nvSpPr>
@@ -8838,6 +9802,10 @@
             <a:tailEnd type="none"/>
           </a:ln>
         </p:spPr>
+        <p:txBody>
+          <a:bodyPr/>
+          <a:p/>
+        </p:txBody>
       </p:sp>
       <p:sp>
         <p:nvSpPr>
@@ -8862,6 +9830,10 @@
             <a:tailEnd type="none"/>
           </a:ln>
         </p:spPr>
+        <p:txBody>
+          <a:bodyPr/>
+          <a:p/>
+        </p:txBody>
       </p:sp>
       <p:sp>
         <p:nvSpPr>
@@ -8886,6 +9858,10 @@
             <a:tailEnd type="none"/>
           </a:ln>
         </p:spPr>
+        <p:txBody>
+          <a:bodyPr/>
+          <a:p/>
+        </p:txBody>
       </p:sp>
       <p:sp>
         <p:nvSpPr>
@@ -8910,6 +9886,10 @@
             <a:tailEnd type="none"/>
           </a:ln>
         </p:spPr>
+        <p:txBody>
+          <a:bodyPr/>
+          <a:p/>
+        </p:txBody>
       </p:sp>
       <p:sp>
         <p:nvSpPr>
@@ -8934,6 +9914,10 @@
             <a:tailEnd type="none"/>
           </a:ln>
         </p:spPr>
+        <p:txBody>
+          <a:bodyPr/>
+          <a:p/>
+        </p:txBody>
       </p:sp>
       <p:sp>
         <p:nvSpPr>
@@ -8958,6 +9942,10 @@
             <a:tailEnd type="none"/>
           </a:ln>
         </p:spPr>
+        <p:txBody>
+          <a:bodyPr/>
+          <a:p/>
+        </p:txBody>
       </p:sp>
       <p:sp>
         <p:nvSpPr>
@@ -8982,6 +9970,10 @@
             <a:tailEnd type="none"/>
           </a:ln>
         </p:spPr>
+        <p:txBody>
+          <a:bodyPr/>
+          <a:p/>
+        </p:txBody>
       </p:sp>
       <p:sp>
         <p:nvSpPr>
@@ -9006,6 +9998,10 @@
             <a:tailEnd type="none"/>
           </a:ln>
         </p:spPr>
+        <p:txBody>
+          <a:bodyPr/>
+          <a:p/>
+        </p:txBody>
       </p:sp>
       <p:sp>
         <p:nvSpPr>
@@ -9030,6 +10026,10 @@
             <a:tailEnd type="none"/>
           </a:ln>
         </p:spPr>
+        <p:txBody>
+          <a:bodyPr/>
+          <a:p/>
+        </p:txBody>
       </p:sp>
       <p:sp>
         <p:nvSpPr>
@@ -9054,6 +10054,10 @@
             <a:tailEnd type="none"/>
           </a:ln>
         </p:spPr>
+        <p:txBody>
+          <a:bodyPr/>
+          <a:p/>
+        </p:txBody>
       </p:sp>
       <p:sp>
         <p:nvSpPr>
@@ -9078,6 +10082,10 @@
             <a:tailEnd type="none"/>
           </a:ln>
         </p:spPr>
+        <p:txBody>
+          <a:bodyPr/>
+          <a:p/>
+        </p:txBody>
       </p:sp>
       <p:sp>
         <p:nvSpPr>
@@ -9102,6 +10110,10 @@
             <a:tailEnd type="none"/>
           </a:ln>
         </p:spPr>
+        <p:txBody>
+          <a:bodyPr/>
+          <a:p/>
+        </p:txBody>
       </p:sp>
       <p:sp>
         <p:nvSpPr>
@@ -9126,6 +10138,10 @@
             <a:tailEnd type="none"/>
           </a:ln>
         </p:spPr>
+        <p:txBody>
+          <a:bodyPr/>
+          <a:p/>
+        </p:txBody>
       </p:sp>
       <p:sp>
         <p:nvSpPr>
@@ -9150,6 +10166,10 @@
             <a:tailEnd type="none"/>
           </a:ln>
         </p:spPr>
+        <p:txBody>
+          <a:bodyPr/>
+          <a:p/>
+        </p:txBody>
       </p:sp>
       <p:sp>
         <p:nvSpPr>
@@ -9174,6 +10194,10 @@
             <a:tailEnd type="none"/>
           </a:ln>
         </p:spPr>
+        <p:txBody>
+          <a:bodyPr/>
+          <a:p/>
+        </p:txBody>
       </p:sp>
       <p:sp>
         <p:nvSpPr>
@@ -9198,6 +10222,10 @@
             <a:tailEnd type="none"/>
           </a:ln>
         </p:spPr>
+        <p:txBody>
+          <a:bodyPr/>
+          <a:p/>
+        </p:txBody>
       </p:sp>
       <p:sp>
         <p:nvSpPr>
@@ -9222,6 +10250,10 @@
             <a:tailEnd type="none"/>
           </a:ln>
         </p:spPr>
+        <p:txBody>
+          <a:bodyPr/>
+          <a:p/>
+        </p:txBody>
       </p:sp>
       <p:sp>
         <p:nvSpPr>
@@ -9246,6 +10278,10 @@
             <a:tailEnd type="none"/>
           </a:ln>
         </p:spPr>
+        <p:txBody>
+          <a:bodyPr/>
+          <a:p/>
+        </p:txBody>
       </p:sp>
       <p:sp>
         <p:nvSpPr>
@@ -9270,6 +10306,10 @@
             <a:tailEnd type="none"/>
           </a:ln>
         </p:spPr>
+        <p:txBody>
+          <a:bodyPr/>
+          <a:p/>
+        </p:txBody>
       </p:sp>
       <p:sp>
         <p:nvSpPr>
@@ -9294,6 +10334,10 @@
             <a:tailEnd type="none"/>
           </a:ln>
         </p:spPr>
+        <p:txBody>
+          <a:bodyPr/>
+          <a:p/>
+        </p:txBody>
       </p:sp>
       <p:sp>
         <p:nvSpPr>
@@ -9318,6 +10362,10 @@
             <a:tailEnd type="none"/>
           </a:ln>
         </p:spPr>
+        <p:txBody>
+          <a:bodyPr/>
+          <a:p/>
+        </p:txBody>
       </p:sp>
       <p:sp>
         <p:nvSpPr>
@@ -9342,6 +10390,10 @@
             <a:tailEnd type="none"/>
           </a:ln>
         </p:spPr>
+        <p:txBody>
+          <a:bodyPr/>
+          <a:p/>
+        </p:txBody>
       </p:sp>
       <p:sp>
         <p:nvSpPr>
@@ -9366,6 +10418,10 @@
             <a:tailEnd type="none"/>
           </a:ln>
         </p:spPr>
+        <p:txBody>
+          <a:bodyPr/>
+          <a:p/>
+        </p:txBody>
       </p:sp>
       <p:sp>
         <p:nvSpPr>
@@ -9390,6 +10446,10 @@
             <a:tailEnd type="none"/>
           </a:ln>
         </p:spPr>
+        <p:txBody>
+          <a:bodyPr/>
+          <a:p/>
+        </p:txBody>
       </p:sp>
       <p:sp>
         <p:nvSpPr>
@@ -9414,6 +10474,10 @@
             <a:tailEnd type="none"/>
           </a:ln>
         </p:spPr>
+        <p:txBody>
+          <a:bodyPr/>
+          <a:p/>
+        </p:txBody>
       </p:sp>
       <p:sp>
         <p:nvSpPr>
@@ -9438,6 +10502,10 @@
             <a:tailEnd type="none"/>
           </a:ln>
         </p:spPr>
+        <p:txBody>
+          <a:bodyPr/>
+          <a:p/>
+        </p:txBody>
       </p:sp>
       <p:sp>
         <p:nvSpPr>
@@ -9462,6 +10530,10 @@
             <a:tailEnd type="none"/>
           </a:ln>
         </p:spPr>
+        <p:txBody>
+          <a:bodyPr/>
+          <a:p/>
+        </p:txBody>
       </p:sp>
       <p:sp>
         <p:nvSpPr>
@@ -9527,6 +10599,10 @@
             <a:tailEnd type="none"/>
           </a:ln>
         </p:spPr>
+        <p:txBody>
+          <a:bodyPr/>
+          <a:p/>
+        </p:txBody>
       </p:sp>
       <p:sp>
         <p:nvSpPr>
@@ -9592,6 +10668,10 @@
             <a:tailEnd type="none"/>
           </a:ln>
         </p:spPr>
+        <p:txBody>
+          <a:bodyPr/>
+          <a:p/>
+        </p:txBody>
       </p:sp>
       <p:sp>
         <p:nvSpPr>
@@ -9815,6 +10895,10 @@
             <a:prstDash val="solid"/>
           </a:ln>
         </p:spPr>
+        <p:txBody>
+          <a:bodyPr/>
+          <a:p/>
+        </p:txBody>
       </p:sp>
       <p:sp>
         <p:nvSpPr>
@@ -9840,6 +10924,10 @@
             <a:prstDash val="solid"/>
           </a:ln>
         </p:spPr>
+        <p:txBody>
+          <a:bodyPr/>
+          <a:p/>
+        </p:txBody>
       </p:sp>
       <p:sp>
         <p:nvSpPr>
@@ -10023,6 +11111,10 @@
             <a:prstDash val="solid"/>
           </a:ln>
         </p:spPr>
+        <p:txBody>
+          <a:bodyPr/>
+          <a:p/>
+        </p:txBody>
       </p:sp>
       <p:sp>
         <p:nvSpPr>
@@ -10048,6 +11140,10 @@
             <a:prstDash val="solid"/>
           </a:ln>
         </p:spPr>
+        <p:txBody>
+          <a:bodyPr/>
+          <a:p/>
+        </p:txBody>
       </p:sp>
       <p:sp>
         <p:nvSpPr>
@@ -10218,6 +11314,10 @@
             <a:prstDash val="solid"/>
           </a:ln>
         </p:spPr>
+        <p:txBody>
+          <a:bodyPr/>
+          <a:p/>
+        </p:txBody>
       </p:sp>
       <p:sp>
         <p:nvSpPr>
@@ -10283,6 +11383,10 @@
             <a:tailEnd type="triangle"/>
           </a:ln>
         </p:spPr>
+        <p:txBody>
+          <a:bodyPr/>
+          <a:p/>
+        </p:txBody>
       </p:sp>
       <p:sp>
         <p:nvSpPr>
@@ -10307,6 +11411,10 @@
             <a:tailEnd type="triangle"/>
           </a:ln>
         </p:spPr>
+        <p:txBody>
+          <a:bodyPr/>
+          <a:p/>
+        </p:txBody>
       </p:sp>
       <p:sp>
         <p:nvSpPr>
@@ -10413,6 +11521,10 @@
             <a:tailEnd type="none"/>
           </a:ln>
         </p:spPr>
+        <p:txBody>
+          <a:bodyPr/>
+          <a:p/>
+        </p:txBody>
       </p:sp>
       <p:sp>
         <p:nvSpPr>
@@ -10478,6 +11590,10 @@
             <a:tailEnd type="none"/>
           </a:ln>
         </p:spPr>
+        <p:txBody>
+          <a:bodyPr/>
+          <a:p/>
+        </p:txBody>
       </p:sp>
       <p:sp>
         <p:nvSpPr>
@@ -10543,6 +11659,10 @@
             <a:tailEnd type="none"/>
           </a:ln>
         </p:spPr>
+        <p:txBody>
+          <a:bodyPr/>
+          <a:p/>
+        </p:txBody>
       </p:sp>
       <p:sp>
         <p:nvSpPr>
@@ -10608,6 +11728,10 @@
             <a:tailEnd type="none"/>
           </a:ln>
         </p:spPr>
+        <p:txBody>
+          <a:bodyPr/>
+          <a:p/>
+        </p:txBody>
       </p:sp>
       <p:sp>
         <p:nvSpPr>
@@ -10673,6 +11797,10 @@
             <a:tailEnd type="none"/>
           </a:ln>
         </p:spPr>
+        <p:txBody>
+          <a:bodyPr/>
+          <a:p/>
+        </p:txBody>
       </p:sp>
       <p:sp>
         <p:nvSpPr>
@@ -10738,6 +11866,10 @@
             <a:tailEnd type="none"/>
           </a:ln>
         </p:spPr>
+        <p:txBody>
+          <a:bodyPr/>
+          <a:p/>
+        </p:txBody>
       </p:sp>
       <p:sp>
         <p:nvSpPr>
@@ -10803,6 +11935,10 @@
             <a:tailEnd type="none"/>
           </a:ln>
         </p:spPr>
+        <p:txBody>
+          <a:bodyPr/>
+          <a:p/>
+        </p:txBody>
       </p:sp>
       <p:sp>
         <p:nvSpPr>
@@ -10868,6 +12004,10 @@
             <a:tailEnd type="none"/>
           </a:ln>
         </p:spPr>
+        <p:txBody>
+          <a:bodyPr/>
+          <a:p/>
+        </p:txBody>
       </p:sp>
       <p:sp>
         <p:nvSpPr>
@@ -10933,6 +12073,10 @@
             <a:tailEnd type="none"/>
           </a:ln>
         </p:spPr>
+        <p:txBody>
+          <a:bodyPr/>
+          <a:p/>
+        </p:txBody>
       </p:sp>
       <p:sp>
         <p:nvSpPr>
@@ -10998,6 +12142,10 @@
             <a:tailEnd type="none"/>
           </a:ln>
         </p:spPr>
+        <p:txBody>
+          <a:bodyPr/>
+          <a:p/>
+        </p:txBody>
       </p:sp>
       <p:sp>
         <p:nvSpPr>
@@ -11063,6 +12211,10 @@
             <a:tailEnd type="none"/>
           </a:ln>
         </p:spPr>
+        <p:txBody>
+          <a:bodyPr/>
+          <a:p/>
+        </p:txBody>
       </p:sp>
       <p:sp>
         <p:nvSpPr>
@@ -11087,6 +12239,10 @@
             <a:tailEnd type="none"/>
           </a:ln>
         </p:spPr>
+        <p:txBody>
+          <a:bodyPr/>
+          <a:p/>
+        </p:txBody>
       </p:sp>
       <p:sp>
         <p:nvSpPr>
@@ -11111,6 +12267,10 @@
             <a:tailEnd type="none"/>
           </a:ln>
         </p:spPr>
+        <p:txBody>
+          <a:bodyPr/>
+          <a:p/>
+        </p:txBody>
       </p:sp>
       <p:sp>
         <p:nvSpPr>
@@ -11135,6 +12295,10 @@
             <a:tailEnd type="none"/>
           </a:ln>
         </p:spPr>
+        <p:txBody>
+          <a:bodyPr/>
+          <a:p/>
+        </p:txBody>
       </p:sp>
       <p:sp>
         <p:nvSpPr>
@@ -11159,6 +12323,10 @@
             <a:tailEnd type="none"/>
           </a:ln>
         </p:spPr>
+        <p:txBody>
+          <a:bodyPr/>
+          <a:p/>
+        </p:txBody>
       </p:sp>
       <p:sp>
         <p:nvSpPr>
@@ -11183,6 +12351,10 @@
             <a:tailEnd type="none"/>
           </a:ln>
         </p:spPr>
+        <p:txBody>
+          <a:bodyPr/>
+          <a:p/>
+        </p:txBody>
       </p:sp>
       <p:sp>
         <p:nvSpPr>
@@ -11207,6 +12379,10 @@
             <a:tailEnd type="none"/>
           </a:ln>
         </p:spPr>
+        <p:txBody>
+          <a:bodyPr/>
+          <a:p/>
+        </p:txBody>
       </p:sp>
       <p:sp>
         <p:nvSpPr>
@@ -11231,6 +12407,10 @@
             <a:tailEnd type="none"/>
           </a:ln>
         </p:spPr>
+        <p:txBody>
+          <a:bodyPr/>
+          <a:p/>
+        </p:txBody>
       </p:sp>
       <p:sp>
         <p:nvSpPr>
@@ -11255,6 +12435,10 @@
             <a:tailEnd type="none"/>
           </a:ln>
         </p:spPr>
+        <p:txBody>
+          <a:bodyPr/>
+          <a:p/>
+        </p:txBody>
       </p:sp>
       <p:sp>
         <p:nvSpPr>
@@ -11279,6 +12463,10 @@
             <a:tailEnd type="none"/>
           </a:ln>
         </p:spPr>
+        <p:txBody>
+          <a:bodyPr/>
+          <a:p/>
+        </p:txBody>
       </p:sp>
       <p:sp>
         <p:nvSpPr>
@@ -11303,6 +12491,10 @@
             <a:tailEnd type="none"/>
           </a:ln>
         </p:spPr>
+        <p:txBody>
+          <a:bodyPr/>
+          <a:p/>
+        </p:txBody>
       </p:sp>
       <p:sp>
         <p:nvSpPr>
@@ -11327,6 +12519,10 @@
             <a:tailEnd type="none"/>
           </a:ln>
         </p:spPr>
+        <p:txBody>
+          <a:bodyPr/>
+          <a:p/>
+        </p:txBody>
       </p:sp>
       <p:sp>
         <p:nvSpPr>
@@ -11351,6 +12547,10 @@
             <a:tailEnd type="none"/>
           </a:ln>
         </p:spPr>
+        <p:txBody>
+          <a:bodyPr/>
+          <a:p/>
+        </p:txBody>
       </p:sp>
       <p:sp>
         <p:nvSpPr>
@@ -11375,6 +12575,10 @@
             <a:tailEnd type="none"/>
           </a:ln>
         </p:spPr>
+        <p:txBody>
+          <a:bodyPr/>
+          <a:p/>
+        </p:txBody>
       </p:sp>
       <p:sp>
         <p:nvSpPr>
@@ -11399,6 +12603,10 @@
             <a:tailEnd type="none"/>
           </a:ln>
         </p:spPr>
+        <p:txBody>
+          <a:bodyPr/>
+          <a:p/>
+        </p:txBody>
       </p:sp>
       <p:sp>
         <p:nvSpPr>
@@ -11423,6 +12631,10 @@
             <a:tailEnd type="none"/>
           </a:ln>
         </p:spPr>
+        <p:txBody>
+          <a:bodyPr/>
+          <a:p/>
+        </p:txBody>
       </p:sp>
       <p:sp>
         <p:nvSpPr>
@@ -11447,6 +12659,10 @@
             <a:tailEnd type="none"/>
           </a:ln>
         </p:spPr>
+        <p:txBody>
+          <a:bodyPr/>
+          <a:p/>
+        </p:txBody>
       </p:sp>
       <p:sp>
         <p:nvSpPr>
@@ -11471,6 +12687,10 @@
             <a:tailEnd type="none"/>
           </a:ln>
         </p:spPr>
+        <p:txBody>
+          <a:bodyPr/>
+          <a:p/>
+        </p:txBody>
       </p:sp>
       <p:sp>
         <p:nvSpPr>
@@ -11495,6 +12715,10 @@
             <a:tailEnd type="none"/>
           </a:ln>
         </p:spPr>
+        <p:txBody>
+          <a:bodyPr/>
+          <a:p/>
+        </p:txBody>
       </p:sp>
       <p:sp>
         <p:nvSpPr>
@@ -11519,6 +12743,10 @@
             <a:tailEnd type="none"/>
           </a:ln>
         </p:spPr>
+        <p:txBody>
+          <a:bodyPr/>
+          <a:p/>
+        </p:txBody>
       </p:sp>
       <p:sp>
         <p:nvSpPr>
@@ -11543,6 +12771,10 @@
             <a:tailEnd type="none"/>
           </a:ln>
         </p:spPr>
+        <p:txBody>
+          <a:bodyPr/>
+          <a:p/>
+        </p:txBody>
       </p:sp>
       <p:sp>
         <p:nvSpPr>
@@ -11567,6 +12799,10 @@
             <a:tailEnd type="none"/>
           </a:ln>
         </p:spPr>
+        <p:txBody>
+          <a:bodyPr/>
+          <a:p/>
+        </p:txBody>
       </p:sp>
       <p:sp>
         <p:nvSpPr>
@@ -11591,6 +12827,10 @@
             <a:tailEnd type="none"/>
           </a:ln>
         </p:spPr>
+        <p:txBody>
+          <a:bodyPr/>
+          <a:p/>
+        </p:txBody>
       </p:sp>
       <p:sp>
         <p:nvSpPr>
@@ -11615,6 +12855,10 @@
             <a:tailEnd type="none"/>
           </a:ln>
         </p:spPr>
+        <p:txBody>
+          <a:bodyPr/>
+          <a:p/>
+        </p:txBody>
       </p:sp>
       <p:sp>
         <p:nvSpPr>
@@ -11639,6 +12883,10 @@
             <a:tailEnd type="none"/>
           </a:ln>
         </p:spPr>
+        <p:txBody>
+          <a:bodyPr/>
+          <a:p/>
+        </p:txBody>
       </p:sp>
       <p:sp>
         <p:nvSpPr>
@@ -11663,6 +12911,10 @@
             <a:tailEnd type="none"/>
           </a:ln>
         </p:spPr>
+        <p:txBody>
+          <a:bodyPr/>
+          <a:p/>
+        </p:txBody>
       </p:sp>
       <p:sp>
         <p:nvSpPr>
@@ -11687,6 +12939,10 @@
             <a:tailEnd type="none"/>
           </a:ln>
         </p:spPr>
+        <p:txBody>
+          <a:bodyPr/>
+          <a:p/>
+        </p:txBody>
       </p:sp>
       <p:sp>
         <p:nvSpPr>
@@ -11711,6 +12967,10 @@
             <a:tailEnd type="none"/>
           </a:ln>
         </p:spPr>
+        <p:txBody>
+          <a:bodyPr/>
+          <a:p/>
+        </p:txBody>
       </p:sp>
       <p:sp>
         <p:nvSpPr>
@@ -11735,6 +12995,10 @@
             <a:tailEnd type="none"/>
           </a:ln>
         </p:spPr>
+        <p:txBody>
+          <a:bodyPr/>
+          <a:p/>
+        </p:txBody>
       </p:sp>
       <p:sp>
         <p:nvSpPr>
@@ -11759,6 +13023,10 @@
             <a:tailEnd type="none"/>
           </a:ln>
         </p:spPr>
+        <p:txBody>
+          <a:bodyPr/>
+          <a:p/>
+        </p:txBody>
       </p:sp>
       <p:sp>
         <p:nvSpPr>
@@ -11783,6 +13051,10 @@
             <a:tailEnd type="none"/>
           </a:ln>
         </p:spPr>
+        <p:txBody>
+          <a:bodyPr/>
+          <a:p/>
+        </p:txBody>
       </p:sp>
       <p:sp>
         <p:nvSpPr>
@@ -11807,6 +13079,10 @@
             <a:tailEnd type="none"/>
           </a:ln>
         </p:spPr>
+        <p:txBody>
+          <a:bodyPr/>
+          <a:p/>
+        </p:txBody>
       </p:sp>
       <p:sp>
         <p:nvSpPr>
@@ -11831,6 +13107,10 @@
             <a:tailEnd type="none"/>
           </a:ln>
         </p:spPr>
+        <p:txBody>
+          <a:bodyPr/>
+          <a:p/>
+        </p:txBody>
       </p:sp>
       <p:sp>
         <p:nvSpPr>
@@ -11855,6 +13135,10 @@
             <a:tailEnd type="none"/>
           </a:ln>
         </p:spPr>
+        <p:txBody>
+          <a:bodyPr/>
+          <a:p/>
+        </p:txBody>
       </p:sp>
       <p:sp>
         <p:nvSpPr>
@@ -11879,6 +13163,10 @@
             <a:tailEnd type="none"/>
           </a:ln>
         </p:spPr>
+        <p:txBody>
+          <a:bodyPr/>
+          <a:p/>
+        </p:txBody>
       </p:sp>
       <p:sp>
         <p:nvSpPr>
@@ -11903,6 +13191,10 @@
             <a:tailEnd type="none"/>
           </a:ln>
         </p:spPr>
+        <p:txBody>
+          <a:bodyPr/>
+          <a:p/>
+        </p:txBody>
       </p:sp>
       <p:sp>
         <p:nvSpPr>
@@ -11927,6 +13219,10 @@
             <a:tailEnd type="none"/>
           </a:ln>
         </p:spPr>
+        <p:txBody>
+          <a:bodyPr/>
+          <a:p/>
+        </p:txBody>
       </p:sp>
       <p:sp>
         <p:nvSpPr>
@@ -11951,6 +13247,10 @@
             <a:tailEnd type="none"/>
           </a:ln>
         </p:spPr>
+        <p:txBody>
+          <a:bodyPr/>
+          <a:p/>
+        </p:txBody>
       </p:sp>
       <p:sp>
         <p:nvSpPr>
@@ -11975,6 +13275,10 @@
             <a:tailEnd type="none"/>
           </a:ln>
         </p:spPr>
+        <p:txBody>
+          <a:bodyPr/>
+          <a:p/>
+        </p:txBody>
       </p:sp>
       <p:sp>
         <p:nvSpPr>
@@ -11999,6 +13303,10 @@
             <a:tailEnd type="none"/>
           </a:ln>
         </p:spPr>
+        <p:txBody>
+          <a:bodyPr/>
+          <a:p/>
+        </p:txBody>
       </p:sp>
       <p:sp>
         <p:nvSpPr>
@@ -12023,6 +13331,10 @@
             <a:tailEnd type="none"/>
           </a:ln>
         </p:spPr>
+        <p:txBody>
+          <a:bodyPr/>
+          <a:p/>
+        </p:txBody>
       </p:sp>
       <p:sp>
         <p:nvSpPr>
@@ -12047,6 +13359,10 @@
             <a:tailEnd type="none"/>
           </a:ln>
         </p:spPr>
+        <p:txBody>
+          <a:bodyPr/>
+          <a:p/>
+        </p:txBody>
       </p:sp>
       <p:sp>
         <p:nvSpPr>
@@ -12071,6 +13387,10 @@
             <a:tailEnd type="none"/>
           </a:ln>
         </p:spPr>
+        <p:txBody>
+          <a:bodyPr/>
+          <a:p/>
+        </p:txBody>
       </p:sp>
       <p:sp>
         <p:nvSpPr>
@@ -12095,6 +13415,10 @@
             <a:tailEnd type="none"/>
           </a:ln>
         </p:spPr>
+        <p:txBody>
+          <a:bodyPr/>
+          <a:p/>
+        </p:txBody>
       </p:sp>
       <p:sp>
         <p:nvSpPr>
@@ -12119,6 +13443,10 @@
             <a:tailEnd type="none"/>
           </a:ln>
         </p:spPr>
+        <p:txBody>
+          <a:bodyPr/>
+          <a:p/>
+        </p:txBody>
       </p:sp>
       <p:sp>
         <p:nvSpPr>
@@ -12143,6 +13471,10 @@
             <a:tailEnd type="none"/>
           </a:ln>
         </p:spPr>
+        <p:txBody>
+          <a:bodyPr/>
+          <a:p/>
+        </p:txBody>
       </p:sp>
       <p:sp>
         <p:nvSpPr>
@@ -12167,6 +13499,10 @@
             <a:tailEnd type="none"/>
           </a:ln>
         </p:spPr>
+        <p:txBody>
+          <a:bodyPr/>
+          <a:p/>
+        </p:txBody>
       </p:sp>
       <p:sp>
         <p:nvSpPr>
@@ -12191,6 +13527,10 @@
             <a:tailEnd type="none"/>
           </a:ln>
         </p:spPr>
+        <p:txBody>
+          <a:bodyPr/>
+          <a:p/>
+        </p:txBody>
       </p:sp>
       <p:sp>
         <p:nvSpPr>
@@ -12215,6 +13555,10 @@
             <a:tailEnd type="none"/>
           </a:ln>
         </p:spPr>
+        <p:txBody>
+          <a:bodyPr/>
+          <a:p/>
+        </p:txBody>
       </p:sp>
       <p:sp>
         <p:nvSpPr>
@@ -12239,6 +13583,10 @@
             <a:tailEnd type="none"/>
           </a:ln>
         </p:spPr>
+        <p:txBody>
+          <a:bodyPr/>
+          <a:p/>
+        </p:txBody>
       </p:sp>
       <p:sp>
         <p:nvSpPr>
@@ -12264,6 +13612,10 @@
             <a:prstDash val="solid"/>
           </a:ln>
         </p:spPr>
+        <p:txBody>
+          <a:bodyPr/>
+          <a:p/>
+        </p:txBody>
       </p:sp>
       <p:sp>
         <p:nvSpPr>
@@ -12330,6 +13682,10 @@
             <a:prstDash val="solid"/>
           </a:ln>
         </p:spPr>
+        <p:txBody>
+          <a:bodyPr/>
+          <a:p/>
+        </p:txBody>
       </p:sp>
       <p:sp>
         <p:nvSpPr>
@@ -12396,6 +13752,10 @@
             <a:prstDash val="solid"/>
           </a:ln>
         </p:spPr>
+        <p:txBody>
+          <a:bodyPr/>
+          <a:p/>
+        </p:txBody>
       </p:sp>
       <p:sp>
         <p:nvSpPr>
@@ -12660,6 +14020,10 @@
             <a:prstDash val="solid"/>
           </a:ln>
         </p:spPr>
+        <p:txBody>
+          <a:bodyPr/>
+          <a:p/>
+        </p:txBody>
       </p:sp>
       <p:sp>
         <p:nvSpPr>
@@ -12685,6 +14049,10 @@
             <a:prstDash val="solid"/>
           </a:ln>
         </p:spPr>
+        <p:txBody>
+          <a:bodyPr/>
+          <a:p/>
+        </p:txBody>
       </p:sp>
       <p:sp>
         <p:nvSpPr>
@@ -12851,6 +14219,10 @@
             <a:prstDash val="solid"/>
           </a:ln>
         </p:spPr>
+        <p:txBody>
+          <a:bodyPr/>
+          <a:p/>
+        </p:txBody>
       </p:sp>
       <p:sp>
         <p:nvSpPr>
@@ -12876,6 +14248,10 @@
             <a:prstDash val="solid"/>
           </a:ln>
         </p:spPr>
+        <p:txBody>
+          <a:bodyPr/>
+          <a:p/>
+        </p:txBody>
       </p:sp>
       <p:sp>
         <p:nvSpPr>
@@ -13031,6 +14407,10 @@
             <a:prstDash val="solid"/>
           </a:ln>
         </p:spPr>
+        <p:txBody>
+          <a:bodyPr/>
+          <a:p/>
+        </p:txBody>
       </p:sp>
       <p:sp>
         <p:nvSpPr>
@@ -13056,6 +14436,10 @@
             <a:prstDash val="solid"/>
           </a:ln>
         </p:spPr>
+        <p:txBody>
+          <a:bodyPr/>
+          <a:p/>
+        </p:txBody>
       </p:sp>
       <p:sp>
         <p:nvSpPr>
@@ -13289,6 +14673,10 @@
             <a:prstDash val="solid"/>
           </a:ln>
         </p:spPr>
+        <p:txBody>
+          <a:bodyPr/>
+          <a:p/>
+        </p:txBody>
       </p:sp>
       <p:sp>
         <p:nvSpPr>
@@ -13355,6 +14743,10 @@
             <a:prstDash val="solid"/>
           </a:ln>
         </p:spPr>
+        <p:txBody>
+          <a:bodyPr/>
+          <a:p/>
+        </p:txBody>
       </p:sp>
       <p:sp>
         <p:nvSpPr>
@@ -13440,6 +14832,10 @@
             <a:prstDash val="solid"/>
           </a:ln>
         </p:spPr>
+        <p:txBody>
+          <a:bodyPr/>
+          <a:p/>
+        </p:txBody>
       </p:sp>
       <p:sp>
         <p:nvSpPr>
@@ -13467,6 +14863,10 @@
             <a:prstDash val="solid"/>
           </a:ln>
         </p:spPr>
+        <p:txBody>
+          <a:bodyPr/>
+          <a:p/>
+        </p:txBody>
       </p:sp>
       <p:sp>
         <p:nvSpPr>
@@ -13491,6 +14891,10 @@
             <a:tailEnd type="none"/>
           </a:ln>
         </p:spPr>
+        <p:txBody>
+          <a:bodyPr/>
+          <a:p/>
+        </p:txBody>
       </p:sp>
       <p:sp>
         <p:nvSpPr>
@@ -13518,6 +14922,10 @@
             <a:prstDash val="solid"/>
           </a:ln>
         </p:spPr>
+        <p:txBody>
+          <a:bodyPr/>
+          <a:p/>
+        </p:txBody>
       </p:sp>
       <p:sp>
         <p:nvSpPr>
@@ -13545,6 +14953,10 @@
             <a:prstDash val="solid"/>
           </a:ln>
         </p:spPr>
+        <p:txBody>
+          <a:bodyPr/>
+          <a:p/>
+        </p:txBody>
       </p:sp>
       <p:sp>
         <p:nvSpPr>
@@ -13569,6 +14981,10 @@
             <a:tailEnd type="none"/>
           </a:ln>
         </p:spPr>
+        <p:txBody>
+          <a:bodyPr/>
+          <a:p/>
+        </p:txBody>
       </p:sp>
       <p:sp>
         <p:nvSpPr>
@@ -13593,6 +15009,10 @@
             <a:tailEnd type="triangle"/>
           </a:ln>
         </p:spPr>
+        <p:txBody>
+          <a:bodyPr/>
+          <a:p/>
+        </p:txBody>
       </p:sp>
       <p:sp>
         <p:nvSpPr>
@@ -13617,6 +15037,10 @@
             <a:tailEnd type="triangle"/>
           </a:ln>
         </p:spPr>
+        <p:txBody>
+          <a:bodyPr/>
+          <a:p/>
+        </p:txBody>
       </p:sp>
       <p:sp>
         <p:nvSpPr>
@@ -13682,6 +15106,10 @@
             <a:tailEnd type="triangle"/>
           </a:ln>
         </p:spPr>
+        <p:txBody>
+          <a:bodyPr/>
+          <a:p/>
+        </p:txBody>
       </p:sp>
       <p:sp>
         <p:nvSpPr>
@@ -14042,6 +15470,10 @@
             <a:prstDash val="solid"/>
           </a:ln>
         </p:spPr>
+        <p:txBody>
+          <a:bodyPr/>
+          <a:p/>
+        </p:txBody>
       </p:sp>
       <p:sp>
         <p:nvSpPr>
@@ -14107,6 +15539,10 @@
             <a:tailEnd type="triangle"/>
           </a:ln>
         </p:spPr>
+        <p:txBody>
+          <a:bodyPr/>
+          <a:p/>
+        </p:txBody>
       </p:sp>
       <p:sp>
         <p:nvSpPr>
@@ -14131,6 +15567,10 @@
             <a:tailEnd type="triangle"/>
           </a:ln>
         </p:spPr>
+        <p:txBody>
+          <a:bodyPr/>
+          <a:p/>
+        </p:txBody>
       </p:sp>
       <p:sp>
         <p:nvSpPr>
@@ -14237,6 +15677,10 @@
             <a:tailEnd type="none"/>
           </a:ln>
         </p:spPr>
+        <p:txBody>
+          <a:bodyPr/>
+          <a:p/>
+        </p:txBody>
       </p:sp>
       <p:sp>
         <p:nvSpPr>
@@ -14302,6 +15746,10 @@
             <a:tailEnd type="none"/>
           </a:ln>
         </p:spPr>
+        <p:txBody>
+          <a:bodyPr/>
+          <a:p/>
+        </p:txBody>
       </p:sp>
       <p:sp>
         <p:nvSpPr>
@@ -14367,6 +15815,10 @@
             <a:tailEnd type="none"/>
           </a:ln>
         </p:spPr>
+        <p:txBody>
+          <a:bodyPr/>
+          <a:p/>
+        </p:txBody>
       </p:sp>
       <p:sp>
         <p:nvSpPr>
@@ -14432,6 +15884,10 @@
             <a:tailEnd type="none"/>
           </a:ln>
         </p:spPr>
+        <p:txBody>
+          <a:bodyPr/>
+          <a:p/>
+        </p:txBody>
       </p:sp>
       <p:sp>
         <p:nvSpPr>
@@ -14497,6 +15953,10 @@
             <a:tailEnd type="none"/>
           </a:ln>
         </p:spPr>
+        <p:txBody>
+          <a:bodyPr/>
+          <a:p/>
+        </p:txBody>
       </p:sp>
       <p:sp>
         <p:nvSpPr>
@@ -14562,6 +16022,10 @@
             <a:tailEnd type="none"/>
           </a:ln>
         </p:spPr>
+        <p:txBody>
+          <a:bodyPr/>
+          <a:p/>
+        </p:txBody>
       </p:sp>
       <p:sp>
         <p:nvSpPr>
@@ -14627,6 +16091,10 @@
             <a:tailEnd type="none"/>
           </a:ln>
         </p:spPr>
+        <p:txBody>
+          <a:bodyPr/>
+          <a:p/>
+        </p:txBody>
       </p:sp>
       <p:sp>
         <p:nvSpPr>
@@ -14692,6 +16160,10 @@
             <a:tailEnd type="none"/>
           </a:ln>
         </p:spPr>
+        <p:txBody>
+          <a:bodyPr/>
+          <a:p/>
+        </p:txBody>
       </p:sp>
       <p:sp>
         <p:nvSpPr>
@@ -14757,6 +16229,10 @@
             <a:tailEnd type="none"/>
           </a:ln>
         </p:spPr>
+        <p:txBody>
+          <a:bodyPr/>
+          <a:p/>
+        </p:txBody>
       </p:sp>
       <p:sp>
         <p:nvSpPr>
@@ -14822,6 +16298,10 @@
             <a:tailEnd type="none"/>
           </a:ln>
         </p:spPr>
+        <p:txBody>
+          <a:bodyPr/>
+          <a:p/>
+        </p:txBody>
       </p:sp>
       <p:sp>
         <p:nvSpPr>
@@ -14887,6 +16367,10 @@
             <a:tailEnd type="none"/>
           </a:ln>
         </p:spPr>
+        <p:txBody>
+          <a:bodyPr/>
+          <a:p/>
+        </p:txBody>
       </p:sp>
       <p:sp>
         <p:nvSpPr>
@@ -14911,6 +16395,10 @@
             <a:tailEnd type="none"/>
           </a:ln>
         </p:spPr>
+        <p:txBody>
+          <a:bodyPr/>
+          <a:p/>
+        </p:txBody>
       </p:sp>
       <p:sp>
         <p:nvSpPr>
@@ -14935,6 +16423,10 @@
             <a:tailEnd type="none"/>
           </a:ln>
         </p:spPr>
+        <p:txBody>
+          <a:bodyPr/>
+          <a:p/>
+        </p:txBody>
       </p:sp>
       <p:sp>
         <p:nvSpPr>
@@ -14959,6 +16451,10 @@
             <a:tailEnd type="none"/>
           </a:ln>
         </p:spPr>
+        <p:txBody>
+          <a:bodyPr/>
+          <a:p/>
+        </p:txBody>
       </p:sp>
       <p:sp>
         <p:nvSpPr>
@@ -14983,6 +16479,10 @@
             <a:tailEnd type="none"/>
           </a:ln>
         </p:spPr>
+        <p:txBody>
+          <a:bodyPr/>
+          <a:p/>
+        </p:txBody>
       </p:sp>
       <p:sp>
         <p:nvSpPr>
@@ -15007,6 +16507,10 @@
             <a:tailEnd type="none"/>
           </a:ln>
         </p:spPr>
+        <p:txBody>
+          <a:bodyPr/>
+          <a:p/>
+        </p:txBody>
       </p:sp>
       <p:sp>
         <p:nvSpPr>
@@ -15031,6 +16535,10 @@
             <a:tailEnd type="none"/>
           </a:ln>
         </p:spPr>
+        <p:txBody>
+          <a:bodyPr/>
+          <a:p/>
+        </p:txBody>
       </p:sp>
       <p:sp>
         <p:nvSpPr>
@@ -15055,6 +16563,10 @@
             <a:tailEnd type="none"/>
           </a:ln>
         </p:spPr>
+        <p:txBody>
+          <a:bodyPr/>
+          <a:p/>
+        </p:txBody>
       </p:sp>
       <p:sp>
         <p:nvSpPr>
@@ -15079,6 +16591,10 @@
             <a:tailEnd type="none"/>
           </a:ln>
         </p:spPr>
+        <p:txBody>
+          <a:bodyPr/>
+          <a:p/>
+        </p:txBody>
       </p:sp>
       <p:sp>
         <p:nvSpPr>
@@ -15103,6 +16619,10 @@
             <a:tailEnd type="none"/>
           </a:ln>
         </p:spPr>
+        <p:txBody>
+          <a:bodyPr/>
+          <a:p/>
+        </p:txBody>
       </p:sp>
       <p:sp>
         <p:nvSpPr>
@@ -15127,6 +16647,10 @@
             <a:tailEnd type="none"/>
           </a:ln>
         </p:spPr>
+        <p:txBody>
+          <a:bodyPr/>
+          <a:p/>
+        </p:txBody>
       </p:sp>
       <p:sp>
         <p:nvSpPr>
@@ -15151,6 +16675,10 @@
             <a:tailEnd type="none"/>
           </a:ln>
         </p:spPr>
+        <p:txBody>
+          <a:bodyPr/>
+          <a:p/>
+        </p:txBody>
       </p:sp>
       <p:sp>
         <p:nvSpPr>
@@ -15175,6 +16703,10 @@
             <a:tailEnd type="none"/>
           </a:ln>
         </p:spPr>
+        <p:txBody>
+          <a:bodyPr/>
+          <a:p/>
+        </p:txBody>
       </p:sp>
       <p:sp>
         <p:nvSpPr>
@@ -15199,6 +16731,10 @@
             <a:tailEnd type="none"/>
           </a:ln>
         </p:spPr>
+        <p:txBody>
+          <a:bodyPr/>
+          <a:p/>
+        </p:txBody>
       </p:sp>
       <p:sp>
         <p:nvSpPr>
@@ -15223,6 +16759,10 @@
             <a:tailEnd type="none"/>
           </a:ln>
         </p:spPr>
+        <p:txBody>
+          <a:bodyPr/>
+          <a:p/>
+        </p:txBody>
       </p:sp>
       <p:sp>
         <p:nvSpPr>
@@ -15247,6 +16787,10 @@
             <a:tailEnd type="none"/>
           </a:ln>
         </p:spPr>
+        <p:txBody>
+          <a:bodyPr/>
+          <a:p/>
+        </p:txBody>
       </p:sp>
       <p:sp>
         <p:nvSpPr>
@@ -15271,6 +16815,10 @@
             <a:tailEnd type="none"/>
           </a:ln>
         </p:spPr>
+        <p:txBody>
+          <a:bodyPr/>
+          <a:p/>
+        </p:txBody>
       </p:sp>
       <p:sp>
         <p:nvSpPr>
@@ -15295,6 +16843,10 @@
             <a:tailEnd type="none"/>
           </a:ln>
         </p:spPr>
+        <p:txBody>
+          <a:bodyPr/>
+          <a:p/>
+        </p:txBody>
       </p:sp>
       <p:sp>
         <p:nvSpPr>
@@ -15319,6 +16871,10 @@
             <a:tailEnd type="none"/>
           </a:ln>
         </p:spPr>
+        <p:txBody>
+          <a:bodyPr/>
+          <a:p/>
+        </p:txBody>
       </p:sp>
       <p:sp>
         <p:nvSpPr>
@@ -15343,6 +16899,10 @@
             <a:tailEnd type="none"/>
           </a:ln>
         </p:spPr>
+        <p:txBody>
+          <a:bodyPr/>
+          <a:p/>
+        </p:txBody>
       </p:sp>
       <p:sp>
         <p:nvSpPr>
@@ -15367,6 +16927,10 @@
             <a:tailEnd type="none"/>
           </a:ln>
         </p:spPr>
+        <p:txBody>
+          <a:bodyPr/>
+          <a:p/>
+        </p:txBody>
       </p:sp>
       <p:sp>
         <p:nvSpPr>
@@ -15391,6 +16955,10 @@
             <a:tailEnd type="none"/>
           </a:ln>
         </p:spPr>
+        <p:txBody>
+          <a:bodyPr/>
+          <a:p/>
+        </p:txBody>
       </p:sp>
       <p:sp>
         <p:nvSpPr>
@@ -15415,6 +16983,10 @@
             <a:tailEnd type="none"/>
           </a:ln>
         </p:spPr>
+        <p:txBody>
+          <a:bodyPr/>
+          <a:p/>
+        </p:txBody>
       </p:sp>
       <p:sp>
         <p:nvSpPr>
@@ -15439,6 +17011,10 @@
             <a:tailEnd type="none"/>
           </a:ln>
         </p:spPr>
+        <p:txBody>
+          <a:bodyPr/>
+          <a:p/>
+        </p:txBody>
       </p:sp>
       <p:sp>
         <p:nvSpPr>
@@ -15463,6 +17039,10 @@
             <a:tailEnd type="none"/>
           </a:ln>
         </p:spPr>
+        <p:txBody>
+          <a:bodyPr/>
+          <a:p/>
+        </p:txBody>
       </p:sp>
       <p:sp>
         <p:nvSpPr>
@@ -15487,6 +17067,10 @@
             <a:tailEnd type="none"/>
           </a:ln>
         </p:spPr>
+        <p:txBody>
+          <a:bodyPr/>
+          <a:p/>
+        </p:txBody>
       </p:sp>
       <p:sp>
         <p:nvSpPr>
@@ -15511,6 +17095,10 @@
             <a:tailEnd type="none"/>
           </a:ln>
         </p:spPr>
+        <p:txBody>
+          <a:bodyPr/>
+          <a:p/>
+        </p:txBody>
       </p:sp>
       <p:sp>
         <p:nvSpPr>
@@ -15535,6 +17123,10 @@
             <a:tailEnd type="none"/>
           </a:ln>
         </p:spPr>
+        <p:txBody>
+          <a:bodyPr/>
+          <a:p/>
+        </p:txBody>
       </p:sp>
       <p:sp>
         <p:nvSpPr>
@@ -15559,6 +17151,10 @@
             <a:tailEnd type="none"/>
           </a:ln>
         </p:spPr>
+        <p:txBody>
+          <a:bodyPr/>
+          <a:p/>
+        </p:txBody>
       </p:sp>
       <p:sp>
         <p:nvSpPr>
@@ -15583,6 +17179,10 @@
             <a:tailEnd type="none"/>
           </a:ln>
         </p:spPr>
+        <p:txBody>
+          <a:bodyPr/>
+          <a:p/>
+        </p:txBody>
       </p:sp>
       <p:sp>
         <p:nvSpPr>
@@ -15607,6 +17207,10 @@
             <a:tailEnd type="none"/>
           </a:ln>
         </p:spPr>
+        <p:txBody>
+          <a:bodyPr/>
+          <a:p/>
+        </p:txBody>
       </p:sp>
       <p:sp>
         <p:nvSpPr>
@@ -15631,6 +17235,10 @@
             <a:tailEnd type="none"/>
           </a:ln>
         </p:spPr>
+        <p:txBody>
+          <a:bodyPr/>
+          <a:p/>
+        </p:txBody>
       </p:sp>
       <p:sp>
         <p:nvSpPr>
@@ -15655,6 +17263,10 @@
             <a:tailEnd type="none"/>
           </a:ln>
         </p:spPr>
+        <p:txBody>
+          <a:bodyPr/>
+          <a:p/>
+        </p:txBody>
       </p:sp>
       <p:sp>
         <p:nvSpPr>
@@ -15679,6 +17291,10 @@
             <a:tailEnd type="none"/>
           </a:ln>
         </p:spPr>
+        <p:txBody>
+          <a:bodyPr/>
+          <a:p/>
+        </p:txBody>
       </p:sp>
       <p:sp>
         <p:nvSpPr>
@@ -15703,6 +17319,10 @@
             <a:tailEnd type="none"/>
           </a:ln>
         </p:spPr>
+        <p:txBody>
+          <a:bodyPr/>
+          <a:p/>
+        </p:txBody>
       </p:sp>
       <p:sp>
         <p:nvSpPr>
@@ -15727,6 +17347,10 @@
             <a:tailEnd type="none"/>
           </a:ln>
         </p:spPr>
+        <p:txBody>
+          <a:bodyPr/>
+          <a:p/>
+        </p:txBody>
       </p:sp>
       <p:sp>
         <p:nvSpPr>
@@ -15751,6 +17375,10 @@
             <a:tailEnd type="none"/>
           </a:ln>
         </p:spPr>
+        <p:txBody>
+          <a:bodyPr/>
+          <a:p/>
+        </p:txBody>
       </p:sp>
       <p:sp>
         <p:nvSpPr>
@@ -15775,6 +17403,10 @@
             <a:tailEnd type="none"/>
           </a:ln>
         </p:spPr>
+        <p:txBody>
+          <a:bodyPr/>
+          <a:p/>
+        </p:txBody>
       </p:sp>
       <p:sp>
         <p:nvSpPr>
@@ -15799,6 +17431,10 @@
             <a:tailEnd type="none"/>
           </a:ln>
         </p:spPr>
+        <p:txBody>
+          <a:bodyPr/>
+          <a:p/>
+        </p:txBody>
       </p:sp>
       <p:sp>
         <p:nvSpPr>
@@ -15823,6 +17459,10 @@
             <a:tailEnd type="none"/>
           </a:ln>
         </p:spPr>
+        <p:txBody>
+          <a:bodyPr/>
+          <a:p/>
+        </p:txBody>
       </p:sp>
       <p:sp>
         <p:nvSpPr>
@@ -15847,6 +17487,10 @@
             <a:tailEnd type="none"/>
           </a:ln>
         </p:spPr>
+        <p:txBody>
+          <a:bodyPr/>
+          <a:p/>
+        </p:txBody>
       </p:sp>
       <p:sp>
         <p:nvSpPr>
@@ -15871,6 +17515,10 @@
             <a:tailEnd type="none"/>
           </a:ln>
         </p:spPr>
+        <p:txBody>
+          <a:bodyPr/>
+          <a:p/>
+        </p:txBody>
       </p:sp>
       <p:sp>
         <p:nvSpPr>
@@ -15895,6 +17543,10 @@
             <a:tailEnd type="none"/>
           </a:ln>
         </p:spPr>
+        <p:txBody>
+          <a:bodyPr/>
+          <a:p/>
+        </p:txBody>
       </p:sp>
       <p:sp>
         <p:nvSpPr>
@@ -15919,6 +17571,10 @@
             <a:tailEnd type="none"/>
           </a:ln>
         </p:spPr>
+        <p:txBody>
+          <a:bodyPr/>
+          <a:p/>
+        </p:txBody>
       </p:sp>
       <p:sp>
         <p:nvSpPr>
@@ -15943,6 +17599,10 @@
             <a:tailEnd type="none"/>
           </a:ln>
         </p:spPr>
+        <p:txBody>
+          <a:bodyPr/>
+          <a:p/>
+        </p:txBody>
       </p:sp>
       <p:sp>
         <p:nvSpPr>
@@ -15967,6 +17627,10 @@
             <a:tailEnd type="none"/>
           </a:ln>
         </p:spPr>
+        <p:txBody>
+          <a:bodyPr/>
+          <a:p/>
+        </p:txBody>
       </p:sp>
       <p:sp>
         <p:nvSpPr>
@@ -15991,6 +17655,10 @@
             <a:tailEnd type="none"/>
           </a:ln>
         </p:spPr>
+        <p:txBody>
+          <a:bodyPr/>
+          <a:p/>
+        </p:txBody>
       </p:sp>
       <p:sp>
         <p:nvSpPr>
@@ -16015,6 +17683,10 @@
             <a:tailEnd type="none"/>
           </a:ln>
         </p:spPr>
+        <p:txBody>
+          <a:bodyPr/>
+          <a:p/>
+        </p:txBody>
       </p:sp>
       <p:sp>
         <p:nvSpPr>
@@ -16039,6 +17711,10 @@
             <a:tailEnd type="none"/>
           </a:ln>
         </p:spPr>
+        <p:txBody>
+          <a:bodyPr/>
+          <a:p/>
+        </p:txBody>
       </p:sp>
       <p:sp>
         <p:nvSpPr>
@@ -16063,6 +17739,10 @@
             <a:tailEnd type="none"/>
           </a:ln>
         </p:spPr>
+        <p:txBody>
+          <a:bodyPr/>
+          <a:p/>
+        </p:txBody>
       </p:sp>
       <p:sp>
         <p:nvSpPr>
@@ -16088,6 +17768,10 @@
             <a:prstDash val="solid"/>
           </a:ln>
         </p:spPr>
+        <p:txBody>
+          <a:bodyPr/>
+          <a:p/>
+        </p:txBody>
       </p:sp>
       <p:sp>
         <p:nvSpPr>
@@ -16154,6 +17838,10 @@
             <a:prstDash val="solid"/>
           </a:ln>
         </p:spPr>
+        <p:txBody>
+          <a:bodyPr/>
+          <a:p/>
+        </p:txBody>
       </p:sp>
       <p:sp>
         <p:nvSpPr>
@@ -16220,6 +17908,10 @@
             <a:prstDash val="solid"/>
           </a:ln>
         </p:spPr>
+        <p:txBody>
+          <a:bodyPr/>
+          <a:p/>
+        </p:txBody>
       </p:sp>
       <p:sp>
         <p:nvSpPr>
@@ -16329,6 +18021,10 @@
             <a:prstDash val="solid"/>
           </a:ln>
         </p:spPr>
+        <p:txBody>
+          <a:bodyPr/>
+          <a:p/>
+        </p:txBody>
       </p:sp>
       <p:sp>
         <p:nvSpPr>
@@ -16354,6 +18050,10 @@
             <a:prstDash val="solid"/>
           </a:ln>
         </p:spPr>
+        <p:txBody>
+          <a:bodyPr/>
+          <a:p/>
+        </p:txBody>
       </p:sp>
       <p:sp>
         <p:nvSpPr>
@@ -16554,6 +18254,10 @@
             <a:prstDash val="solid"/>
           </a:ln>
         </p:spPr>
+        <p:txBody>
+          <a:bodyPr/>
+          <a:p/>
+        </p:txBody>
       </p:sp>
       <p:sp>
         <p:nvSpPr>
@@ -16579,6 +18283,10 @@
             <a:prstDash val="solid"/>
           </a:ln>
         </p:spPr>
+        <p:txBody>
+          <a:bodyPr/>
+          <a:p/>
+        </p:txBody>
       </p:sp>
       <p:sp>
         <p:nvSpPr>
@@ -16928,6 +18636,10 @@
             <a:prstDash val="solid"/>
           </a:ln>
         </p:spPr>
+        <p:txBody>
+          <a:bodyPr/>
+          <a:p/>
+        </p:txBody>
       </p:sp>
       <p:sp>
         <p:nvSpPr>
@@ -16953,6 +18665,10 @@
             <a:prstDash val="solid"/>
           </a:ln>
         </p:spPr>
+        <p:txBody>
+          <a:bodyPr/>
+          <a:p/>
+        </p:txBody>
       </p:sp>
       <p:sp>
         <p:nvSpPr>
@@ -17238,6 +18954,10 @@
             <a:prstDash val="solid"/>
           </a:ln>
         </p:spPr>
+        <p:txBody>
+          <a:bodyPr/>
+          <a:p/>
+        </p:txBody>
       </p:sp>
       <p:sp>
         <p:nvSpPr>
@@ -17263,6 +18983,10 @@
             <a:prstDash val="solid"/>
           </a:ln>
         </p:spPr>
+        <p:txBody>
+          <a:bodyPr/>
+          <a:p/>
+        </p:txBody>
       </p:sp>
       <p:sp>
         <p:nvSpPr>
@@ -17565,6 +19289,10 @@
             <a:prstDash val="solid"/>
           </a:ln>
         </p:spPr>
+        <p:txBody>
+          <a:bodyPr/>
+          <a:p/>
+        </p:txBody>
       </p:sp>
       <p:sp>
         <p:nvSpPr>
@@ -17590,6 +19318,10 @@
             <a:prstDash val="solid"/>
           </a:ln>
         </p:spPr>
+        <p:txBody>
+          <a:bodyPr/>
+          <a:p/>
+        </p:txBody>
       </p:sp>
       <p:sp>
         <p:nvSpPr>
@@ -17655,163 +19387,302 @@
           </a:bodyPr>
           <a:lstStyle/>
           <a:p>
-            <a:pPr algn="l" indent="0" marL="0">
-              <a:buNone/>
+            <a:pPr>
+              <a:lnSpc>
+                <a:spcPct val="100000"/>
+              </a:lnSpc>
+              <a:spcBef>
+                <a:spcPts val="0"/>
+              </a:spcBef>
+              <a:spcAft>
+                <a:spcPts val="120"/>
+              </a:spcAft>
             </a:pPr>
             <a:r>
-              <a:rPr lang="en-US" sz="1070" dirty="0">
-                <a:solidFill>
-                  <a:srgbClr val="2D3640"/>
-                </a:solidFill>
-                <a:latin typeface="Noto Sans CJK JP" pitchFamily="34" charset="0"/>
-                <a:ea typeface="Noto Sans CJK JP" pitchFamily="34" charset="-122"/>
-                <a:cs typeface="Noto Sans CJK JP" pitchFamily="34" charset="-120"/>
+              <a:rPr sz="880">
+                <a:latin typeface="Noto Sans CJK JP"/>
               </a:rPr>
               <a:t>Φ と Ψ=NΦ を混同しない</a:t>
             </a:r>
-            <a:endParaRPr lang="en-US" sz="1070" dirty="0"/>
-          </a:p>
-          <a:p>
-            <a:pPr algn="l" indent="0" marL="0">
-              <a:buNone/>
+          </a:p>
+          <a:p>
+            <a:pPr>
+              <a:lnSpc>
+                <a:spcPct val="100000"/>
+              </a:lnSpc>
+              <a:spcBef>
+                <a:spcPts val="0"/>
+              </a:spcBef>
+              <a:spcAft>
+                <a:spcPts val="120"/>
+              </a:spcAft>
             </a:pPr>
             <a:r>
-              <a:rPr lang="en-US" sz="1070" dirty="0">
-                <a:solidFill>
-                  <a:srgbClr val="2D3640"/>
-                </a:solidFill>
-                <a:latin typeface="Noto Sans CJK JP" pitchFamily="34" charset="0"/>
-                <a:ea typeface="Noto Sans CJK JP" pitchFamily="34" charset="-122"/>
-                <a:cs typeface="Noto Sans CJK JP" pitchFamily="34" charset="-120"/>
+              <a:rPr sz="880">
+                <a:latin typeface="Noto Sans CJK JP"/>
               </a:rPr>
               <a:t>e=−dΨ/dt の負号を向き確認に使う</a:t>
             </a:r>
-            <a:endParaRPr lang="en-US" sz="1070" dirty="0"/>
-          </a:p>
-          <a:p>
-            <a:pPr algn="l" indent="0" marL="0">
-              <a:buNone/>
+          </a:p>
+          <a:p>
+            <a:pPr>
+              <a:lnSpc>
+                <a:spcPct val="100000"/>
+              </a:lnSpc>
+              <a:spcBef>
+                <a:spcPts val="0"/>
+              </a:spcBef>
+              <a:spcAft>
+                <a:spcPts val="120"/>
+              </a:spcAft>
             </a:pPr>
             <a:r>
-              <a:rPr lang="en-US" sz="1070" dirty="0">
-                <a:solidFill>
-                  <a:srgbClr val="2D3640"/>
-                </a:solidFill>
-                <a:latin typeface="Noto Sans CJK JP" pitchFamily="34" charset="0"/>
-                <a:ea typeface="Noto Sans CJK JP" pitchFamily="34" charset="-122"/>
-                <a:cs typeface="Noto Sans CJK JP" pitchFamily="34" charset="-120"/>
+              <a:rPr sz="880">
+                <a:latin typeface="Noto Sans CJK JP"/>
               </a:rPr>
               <a:t>位置微分で v を掛け忘れない</a:t>
             </a:r>
-            <a:endParaRPr lang="en-US" sz="1070" dirty="0"/>
-          </a:p>
-          <a:p>
-            <a:pPr algn="l" indent="0" marL="0">
-              <a:buNone/>
+          </a:p>
+          <a:p>
+            <a:pPr>
+              <a:lnSpc>
+                <a:spcPct val="100000"/>
+              </a:lnSpc>
+              <a:spcBef>
+                <a:spcPts val="0"/>
+              </a:spcBef>
+              <a:spcAft>
+                <a:spcPts val="120"/>
+              </a:spcAft>
             </a:pPr>
             <a:r>
-              <a:rPr lang="en-US" sz="1070" dirty="0">
-                <a:solidFill>
-                  <a:srgbClr val="2D3640"/>
-                </a:solidFill>
-                <a:latin typeface="Noto Sans CJK JP" pitchFamily="34" charset="0"/>
-                <a:ea typeface="Noto Sans CJK JP" pitchFamily="34" charset="-122"/>
-                <a:cs typeface="Noto Sans CJK JP" pitchFamily="34" charset="-120"/>
+              <a:rPr sz="880">
+                <a:latin typeface="Noto Sans CJK JP"/>
               </a:rPr>
               <a:t>常に I=E/R としない</a:t>
             </a:r>
-            <a:endParaRPr lang="en-US" sz="1070" dirty="0"/>
-          </a:p>
-          <a:p>
-            <a:pPr algn="l" indent="0" marL="0">
-              <a:buNone/>
+          </a:p>
+          <a:p>
+            <a:pPr>
+              <a:lnSpc>
+                <a:spcPct val="100000"/>
+              </a:lnSpc>
+              <a:spcBef>
+                <a:spcPts val="0"/>
+              </a:spcBef>
+              <a:spcAft>
+                <a:spcPts val="120"/>
+              </a:spcAft>
             </a:pPr>
             <a:r>
-              <a:rPr lang="en-US" sz="1070" dirty="0">
-                <a:solidFill>
-                  <a:srgbClr val="2D3640"/>
-                </a:solidFill>
-                <a:latin typeface="Noto Sans CJK JP" pitchFamily="34" charset="0"/>
-                <a:ea typeface="Noto Sans CJK JP" pitchFamily="34" charset="-122"/>
-                <a:cs typeface="Noto Sans CJK JP" pitchFamily="34" charset="-120"/>
+              <a:rPr sz="880">
+                <a:latin typeface="Noto Sans CJK JP"/>
               </a:rPr>
               <a:t>Wm / W′m の保持量を確認</a:t>
             </a:r>
-            <a:endParaRPr lang="en-US" sz="1070" dirty="0"/>
-          </a:p>
-          <a:p>
-            <a:pPr algn="l" indent="0" marL="0">
-              <a:buNone/>
+          </a:p>
+          <a:p>
+            <a:pPr>
+              <a:lnSpc>
+                <a:spcPct val="100000"/>
+              </a:lnSpc>
+              <a:spcBef>
+                <a:spcPts val="0"/>
+              </a:spcBef>
+              <a:spcAft>
+                <a:spcPts val="120"/>
+              </a:spcAft>
             </a:pPr>
             <a:r>
-              <a:rPr lang="en-US" sz="1070" dirty="0">
-                <a:solidFill>
-                  <a:srgbClr val="2D3640"/>
-                </a:solidFill>
-                <a:latin typeface="Noto Sans CJK JP" pitchFamily="34" charset="0"/>
-                <a:ea typeface="Noto Sans CJK JP" pitchFamily="34" charset="-122"/>
-                <a:cs typeface="Noto Sans CJK JP" pitchFamily="34" charset="-120"/>
+              <a:rPr sz="880">
+                <a:latin typeface="Noto Sans CJK JP"/>
               </a:rPr>
               <a:t>浮上力 Fz と案内力 Fy を混同しない</a:t>
             </a:r>
-            <a:endParaRPr lang="en-US" sz="1070" dirty="0"/>
-          </a:p>
-          <a:p>
-            <a:pPr algn="l" indent="0" marL="0">
-              <a:buNone/>
+          </a:p>
+          <a:p>
+            <a:pPr>
+              <a:lnSpc>
+                <a:spcPct val="100000"/>
+              </a:lnSpc>
+              <a:spcBef>
+                <a:spcPts val="0"/>
+              </a:spcBef>
+              <a:spcAft>
+                <a:spcPts val="120"/>
+              </a:spcAft>
             </a:pPr>
             <a:r>
-              <a:rPr lang="en-US" sz="1070" dirty="0">
-                <a:solidFill>
-                  <a:srgbClr val="2D3640"/>
-                </a:solidFill>
-                <a:latin typeface="Noto Sans CJK JP" pitchFamily="34" charset="0"/>
-                <a:ea typeface="Noto Sans CJK JP" pitchFamily="34" charset="-122"/>
-                <a:cs typeface="Noto Sans CJK JP" pitchFamily="34" charset="-120"/>
+              <a:rPr sz="880">
+                <a:latin typeface="Noto Sans CJK JP"/>
               </a:rPr>
               <a:t>教材モデルをL0系実車特性へ一般化しない</a:t>
             </a:r>
-            <a:endParaRPr lang="en-US" sz="1070" dirty="0"/>
-          </a:p>
-          <a:p>
-            <a:pPr algn="l" indent="0" marL="0">
-              <a:buNone/>
+          </a:p>
+          <a:p>
+            <a:pPr>
+              <a:lnSpc>
+                <a:spcPct val="100000"/>
+              </a:lnSpc>
+              <a:spcBef>
+                <a:spcPts val="0"/>
+              </a:spcBef>
+              <a:spcAft>
+                <a:spcPts val="120"/>
+              </a:spcAft>
             </a:pPr>
-            <a:endParaRPr lang="en-US" sz="1070" dirty="0"/>
-          </a:p>
-          <a:p>
-            <a:pPr algn="l" indent="0" marL="0">
-              <a:buNone/>
+          </a:p>
+          <a:p>
+            <a:pPr>
+              <a:lnSpc>
+                <a:spcPct val="100000"/>
+              </a:lnSpc>
+              <a:spcBef>
+                <a:spcPts val="0"/>
+              </a:spcBef>
+              <a:spcAft>
+                <a:spcPts val="120"/>
+              </a:spcAft>
             </a:pPr>
             <a:r>
-              <a:rPr lang="en-US" sz="1070" dirty="0">
-                <a:solidFill>
-                  <a:srgbClr val="2D3640"/>
-                </a:solidFill>
-                <a:latin typeface="Noto Sans CJK JP" pitchFamily="34" charset="0"/>
-                <a:ea typeface="Noto Sans CJK JP" pitchFamily="34" charset="-122"/>
-                <a:cs typeface="Noto Sans CJK JP" pitchFamily="34" charset="-120"/>
+              <a:rPr sz="880">
+                <a:latin typeface="Noto Sans CJK JP"/>
               </a:rPr>
-              <a:t>H23橋渡し最小限：s=(Ns−N)/Ns, f2=sf1, 逆相制動 sp=2−s</a:t>
+              <a:t>H23二次：r1, x1 が残るならL形等価回路</a:t>
             </a:r>
-            <a:endParaRPr lang="en-US" sz="1070" dirty="0"/>
-          </a:p>
-          <a:p>
-            <a:pPr algn="l" indent="0" marL="0">
-              <a:buNone/>
+          </a:p>
+          <a:p>
+            <a:pPr>
+              <a:lnSpc>
+                <a:spcPct val="100000"/>
+              </a:lnSpc>
+              <a:spcBef>
+                <a:spcPts val="0"/>
+              </a:spcBef>
+              <a:spcAft>
+                <a:spcPts val="120"/>
+              </a:spcAft>
             </a:pPr>
             <a:r>
-              <a:rPr lang="en-US" sz="1070" dirty="0">
-                <a:solidFill>
-                  <a:srgbClr val="2D3640"/>
-                </a:solidFill>
-                <a:latin typeface="Noto Sans CJK JP" pitchFamily="34" charset="0"/>
-                <a:ea typeface="Noto Sans CJK JP" pitchFamily="34" charset="-122"/>
-                <a:cs typeface="Noto Sans CJK JP" pitchFamily="34" charset="-120"/>
+              <a:rPr sz="880">
+                <a:latin typeface="Noto Sans CJK JP"/>
+              </a:rPr>
+              <a:t>V1=VL/√3</a:t>
+            </a:r>
+          </a:p>
+          <a:p>
+            <a:pPr>
+              <a:lnSpc>
+                <a:spcPct val="100000"/>
+              </a:lnSpc>
+              <a:spcBef>
+                <a:spcPts val="0"/>
+              </a:spcBef>
+              <a:spcAft>
+                <a:spcPts val="120"/>
+              </a:spcAft>
+            </a:pPr>
+            <a:r>
+              <a:rPr sz="880">
+                <a:latin typeface="Noto Sans CJK JP"/>
+              </a:rPr>
+              <a:t>I′2=V1/√[(r1+r′2/s)²+(x1+x′2)²]</a:t>
+            </a:r>
+          </a:p>
+          <a:p>
+            <a:pPr>
+              <a:lnSpc>
+                <a:spcPct val="100000"/>
+              </a:lnSpc>
+              <a:spcBef>
+                <a:spcPts val="0"/>
+              </a:spcBef>
+              <a:spcAft>
+                <a:spcPts val="120"/>
+              </a:spcAft>
+            </a:pPr>
+            <a:r>
+              <a:rPr sz="880">
+                <a:latin typeface="Noto Sans CJK JP"/>
+              </a:rPr>
+              <a:t>T=3I′2²(r′2/s)/ωs</a:t>
+            </a:r>
+          </a:p>
+          <a:p>
+            <a:pPr>
+              <a:lnSpc>
+                <a:spcPct val="100000"/>
+              </a:lnSpc>
+              <a:spcBef>
+                <a:spcPts val="0"/>
+              </a:spcBef>
+              <a:spcAft>
+                <a:spcPts val="120"/>
+              </a:spcAft>
+            </a:pPr>
+            <a:r>
+              <a:rPr sz="880">
+                <a:latin typeface="Noto Sans CJK JP"/>
+              </a:rPr>
+              <a:t>smax=r′2/√[r1²+(x1+x′2)²]</a:t>
+            </a:r>
+          </a:p>
+          <a:p>
+            <a:pPr>
+              <a:lnSpc>
+                <a:spcPct val="100000"/>
+              </a:lnSpc>
+              <a:spcBef>
+                <a:spcPts val="0"/>
+              </a:spcBef>
+              <a:spcAft>
+                <a:spcPts val="120"/>
+              </a:spcAft>
+            </a:pPr>
+            <a:r>
+              <a:rPr sz="880">
+                <a:latin typeface="Noto Sans CJK JP"/>
+              </a:rPr>
+              <a:t>逆相制動 sp=2−s、実通過区間 1≤sp≤2</a:t>
+            </a:r>
+          </a:p>
+          <a:p>
+            <a:pPr>
+              <a:lnSpc>
+                <a:spcPct val="100000"/>
+              </a:lnSpc>
+              <a:spcBef>
+                <a:spcPts val="0"/>
+              </a:spcBef>
+              <a:spcAft>
+                <a:spcPts val="120"/>
+              </a:spcAft>
+            </a:pPr>
+            <a:r>
+              <a:rPr sz="880">
+                <a:latin typeface="Noto Sans CJK JP"/>
+              </a:rPr>
+              <a:t>r1,x1 が残るとき smax=r′2/x′2 は使わない</a:t>
+            </a:r>
+          </a:p>
+          <a:p>
+            <a:pPr>
+              <a:lnSpc>
+                <a:spcPct val="100000"/>
+              </a:lnSpc>
+              <a:spcBef>
+                <a:spcPts val="0"/>
+              </a:spcBef>
+              <a:spcAft>
+                <a:spcPts val="120"/>
+              </a:spcAft>
+            </a:pPr>
+            <a:r>
+              <a:rPr sz="880">
+                <a:latin typeface="Noto Sans CJK JP"/>
               </a:rPr>
               <a:t>Topic 30は先取りしない。</a:t>
             </a:r>
-            <a:endParaRPr lang="en-US" sz="1070" dirty="0"/>
           </a:p>
         </p:txBody>
       </p:sp>
